--- a/Analiza pametne logistike globalnog uvoza (1).pptx
+++ b/Analiza pametne logistike globalnog uvoza (1).pptx
@@ -11,6 +11,8 @@
     <p:sldId id="258" r:id="rId6"/>
     <p:sldId id="260" r:id="rId7"/>
     <p:sldId id="261" r:id="rId8"/>
+    <p:sldId id="262" r:id="rId9"/>
+    <p:sldId id="263" r:id="rId10"/>
   </p:sldIdLst>
   <p:sldSz cx="12192000" cy="6858000"/>
   <p:notesSz cx="6858000" cy="9144000"/>
@@ -4042,6 +4044,916 @@
           </a:p>
         </p:txBody>
       </p:sp>
+      <p:graphicFrame>
+        <p:nvGraphicFramePr>
+          <p:cNvPr id="4" name="Content Placeholder 3"/>
+          <p:cNvGraphicFramePr/>
+          <p:nvPr>
+            <p:ph idx="1"/>
+            <p:custDataLst>
+              <p:tags r:id="rId1"/>
+            </p:custDataLst>
+          </p:nvPr>
+        </p:nvGraphicFramePr>
+        <p:xfrm>
+          <a:off x="838200" y="1856105"/>
+          <a:ext cx="7907655" cy="3394710"/>
+        </p:xfrm>
+        <a:graphic>
+          <a:graphicData uri="http://schemas.openxmlformats.org/drawingml/2006/table">
+            <a:tbl>
+              <a:tblPr firstRow="1" bandRow="1">
+                <a:tableStyleId>{3B4B98B0-60AC-42C2-AFA5-B58CD77FA1E5}</a:tableStyleId>
+              </a:tblPr>
+              <a:tblGrid>
+                <a:gridCol w="2184400"/>
+                <a:gridCol w="5723255"/>
+              </a:tblGrid>
+              <a:tr h="377190">
+                <a:tc>
+                  <a:txBody>
+                    <a:bodyPr/>
+                    <a:p>
+                      <a:pPr>
+                        <a:buNone/>
+                      </a:pPr>
+                      <a:r>
+                        <a:rPr lang="en-US" altLang="en-GB" b="0"/>
+                        <a:t>event_id</a:t>
+                      </a:r>
+                      <a:endParaRPr lang="en-GB" altLang="en-US" b="0"/>
+                    </a:p>
+                  </a:txBody>
+                  <a:tcPr/>
+                </a:tc>
+                <a:tc>
+                  <a:txBody>
+                    <a:bodyPr/>
+                    <a:p>
+                      <a:pPr>
+                        <a:buNone/>
+                      </a:pPr>
+                      <a:r>
+                        <a:rPr lang="en-US" altLang="en-GB" b="0"/>
+                        <a:t>jedinstveni identifikator doga</a:t>
+                      </a:r>
+                      <a:r>
+                        <a:rPr lang="" altLang="en-US" b="0"/>
+                        <a:t>đ</a:t>
+                      </a:r>
+                      <a:r>
+                        <a:rPr lang="en-US" altLang="en-GB" b="0"/>
+                        <a:t>aja</a:t>
+                      </a:r>
+                      <a:endParaRPr lang="en-US" altLang="en-GB" b="0"/>
+                    </a:p>
+                  </a:txBody>
+                  <a:tcPr/>
+                </a:tc>
+              </a:tr>
+              <a:tr h="377190">
+                <a:tc>
+                  <a:txBody>
+                    <a:bodyPr/>
+                    <a:p>
+                      <a:pPr>
+                        <a:buNone/>
+                      </a:pPr>
+                      <a:r>
+                        <a:rPr lang="en-US" altLang="en-GB"/>
+                        <a:t>shipment_id</a:t>
+                      </a:r>
+                      <a:endParaRPr lang="en-US" altLang="en-GB"/>
+                    </a:p>
+                  </a:txBody>
+                  <a:tcPr/>
+                </a:tc>
+                <a:tc>
+                  <a:txBody>
+                    <a:bodyPr/>
+                    <a:p>
+                      <a:pPr>
+                        <a:buNone/>
+                      </a:pPr>
+                      <a:r>
+                        <a:rPr lang="en-US" altLang="en-GB"/>
+                        <a:t>identifikator po</a:t>
+                      </a:r>
+                      <a:r>
+                        <a:rPr lang="" altLang="en-US"/>
+                        <a:t>š</a:t>
+                      </a:r>
+                      <a:r>
+                        <a:rPr lang="en-US" altLang="en-GB"/>
+                        <a:t>iljke</a:t>
+                      </a:r>
+                      <a:endParaRPr lang="en-US" altLang="en-GB"/>
+                    </a:p>
+                  </a:txBody>
+                  <a:tcPr/>
+                </a:tc>
+              </a:tr>
+              <a:tr h="377190">
+                <a:tc>
+                  <a:txBody>
+                    <a:bodyPr/>
+                    <a:p>
+                      <a:pPr>
+                        <a:buNone/>
+                      </a:pPr>
+                      <a:r>
+                        <a:rPr lang="en-US" altLang="en-GB"/>
+                        <a:t>event_type</a:t>
+                      </a:r>
+                      <a:endParaRPr lang="en-US" altLang="en-GB"/>
+                    </a:p>
+                  </a:txBody>
+                  <a:tcPr/>
+                </a:tc>
+                <a:tc>
+                  <a:txBody>
+                    <a:bodyPr/>
+                    <a:p>
+                      <a:pPr>
+                        <a:buNone/>
+                      </a:pPr>
+                      <a:r>
+                        <a:rPr lang="en-US" altLang="en-GB"/>
+                        <a:t>tip doga</a:t>
+                      </a:r>
+                      <a:r>
+                        <a:rPr lang="" altLang="en-US"/>
+                        <a:t>đ</a:t>
+                      </a:r>
+                      <a:r>
+                        <a:rPr lang="en-US" altLang="en-GB"/>
+                        <a:t>aja</a:t>
+                      </a:r>
+                      <a:endParaRPr lang="en-US" altLang="en-GB"/>
+                    </a:p>
+                  </a:txBody>
+                  <a:tcPr/>
+                </a:tc>
+              </a:tr>
+              <a:tr h="377190">
+                <a:tc>
+                  <a:txBody>
+                    <a:bodyPr/>
+                    <a:p>
+                      <a:pPr>
+                        <a:buNone/>
+                      </a:pPr>
+                      <a:r>
+                        <a:rPr lang="en-US" altLang="en-GB"/>
+                        <a:t>event_timestamp</a:t>
+                      </a:r>
+                      <a:endParaRPr lang="en-US" altLang="en-GB"/>
+                    </a:p>
+                  </a:txBody>
+                  <a:tcPr/>
+                </a:tc>
+                <a:tc>
+                  <a:txBody>
+                    <a:bodyPr/>
+                    <a:p>
+                      <a:pPr>
+                        <a:buNone/>
+                      </a:pPr>
+                      <a:r>
+                        <a:rPr lang="en-US" altLang="en-GB"/>
+                        <a:t>vreme nastanka doga</a:t>
+                      </a:r>
+                      <a:r>
+                        <a:rPr lang="" altLang="en-US"/>
+                        <a:t>đ</a:t>
+                      </a:r>
+                      <a:r>
+                        <a:rPr lang="en-US" altLang="en-GB"/>
+                        <a:t>aja</a:t>
+                      </a:r>
+                      <a:endParaRPr lang="en-US" altLang="en-GB"/>
+                    </a:p>
+                  </a:txBody>
+                  <a:tcPr/>
+                </a:tc>
+              </a:tr>
+              <a:tr h="377190">
+                <a:tc>
+                  <a:txBody>
+                    <a:bodyPr/>
+                    <a:p>
+                      <a:pPr>
+                        <a:buNone/>
+                      </a:pPr>
+                      <a:r>
+                        <a:rPr lang="en-US" altLang="en-GB"/>
+                        <a:t>location_name</a:t>
+                      </a:r>
+                      <a:endParaRPr lang="en-US" altLang="en-GB"/>
+                    </a:p>
+                  </a:txBody>
+                  <a:tcPr/>
+                </a:tc>
+                <a:tc>
+                  <a:txBody>
+                    <a:bodyPr/>
+                    <a:p>
+                      <a:pPr>
+                        <a:buNone/>
+                      </a:pPr>
+                      <a:r>
+                        <a:rPr lang="en-US" altLang="en-GB"/>
+                        <a:t>lokacija doga</a:t>
+                      </a:r>
+                      <a:r>
+                        <a:rPr lang="" altLang="en-US"/>
+                        <a:t>đ</a:t>
+                      </a:r>
+                      <a:r>
+                        <a:rPr lang="en-US" altLang="en-GB"/>
+                        <a:t>aja</a:t>
+                      </a:r>
+                      <a:endParaRPr lang="en-US" altLang="en-GB"/>
+                    </a:p>
+                  </a:txBody>
+                  <a:tcPr/>
+                </a:tc>
+              </a:tr>
+              <a:tr h="377190">
+                <a:tc>
+                  <a:txBody>
+                    <a:bodyPr/>
+                    <a:p>
+                      <a:pPr>
+                        <a:buNone/>
+                      </a:pPr>
+                      <a:r>
+                        <a:rPr lang="en-US" altLang="en-GB"/>
+                        <a:t>latitude, longitude</a:t>
+                      </a:r>
+                      <a:endParaRPr lang="en-US" altLang="en-GB"/>
+                    </a:p>
+                  </a:txBody>
+                  <a:tcPr/>
+                </a:tc>
+                <a:tc>
+                  <a:txBody>
+                    <a:bodyPr/>
+                    <a:p>
+                      <a:pPr>
+                        <a:buNone/>
+                      </a:pPr>
+                      <a:r>
+                        <a:rPr lang="en-US" altLang="en-GB"/>
+                        <a:t>geografske koordinate</a:t>
+                      </a:r>
+                      <a:endParaRPr lang="en-US" altLang="en-GB"/>
+                    </a:p>
+                  </a:txBody>
+                  <a:tcPr/>
+                </a:tc>
+              </a:tr>
+              <a:tr h="377190">
+                <a:tc>
+                  <a:txBody>
+                    <a:bodyPr/>
+                    <a:p>
+                      <a:pPr>
+                        <a:buNone/>
+                      </a:pPr>
+                      <a:r>
+                        <a:rPr lang="en-US" altLang="en-GB"/>
+                        <a:t>speed_knots</a:t>
+                      </a:r>
+                      <a:endParaRPr lang="en-US" altLang="en-GB"/>
+                    </a:p>
+                  </a:txBody>
+                  <a:tcPr/>
+                </a:tc>
+                <a:tc>
+                  <a:txBody>
+                    <a:bodyPr/>
+                    <a:p>
+                      <a:pPr>
+                        <a:buNone/>
+                      </a:pPr>
+                      <a:r>
+                        <a:rPr lang="en-US" altLang="en-GB"/>
+                        <a:t>brzina transportnog sredstva</a:t>
+                      </a:r>
+                      <a:endParaRPr lang="en-US" altLang="en-GB"/>
+                    </a:p>
+                  </a:txBody>
+                  <a:tcPr/>
+                </a:tc>
+              </a:tr>
+              <a:tr h="377190">
+                <a:tc>
+                  <a:txBody>
+                    <a:bodyPr/>
+                    <a:p>
+                      <a:pPr>
+                        <a:buNone/>
+                      </a:pPr>
+                      <a:r>
+                        <a:rPr lang="en-US" altLang="en-GB"/>
+                        <a:t>heading_deg</a:t>
+                      </a:r>
+                      <a:endParaRPr lang="en-US" altLang="en-GB"/>
+                    </a:p>
+                  </a:txBody>
+                  <a:tcPr/>
+                </a:tc>
+                <a:tc>
+                  <a:txBody>
+                    <a:bodyPr/>
+                    <a:p>
+                      <a:pPr>
+                        <a:buNone/>
+                      </a:pPr>
+                      <a:r>
+                        <a:rPr lang="en-US" altLang="en-GB"/>
+                        <a:t>smer kretanja</a:t>
+                      </a:r>
+                      <a:endParaRPr lang="en-US" altLang="en-GB"/>
+                    </a:p>
+                  </a:txBody>
+                  <a:tcPr/>
+                </a:tc>
+              </a:tr>
+              <a:tr h="377190">
+                <a:tc>
+                  <a:txBody>
+                    <a:bodyPr/>
+                    <a:p>
+                      <a:pPr>
+                        <a:buNone/>
+                      </a:pPr>
+                      <a:r>
+                        <a:rPr lang="en-US" altLang="en-GB"/>
+                        <a:t>temperature_c</a:t>
+                      </a:r>
+                      <a:endParaRPr lang="en-US" altLang="en-GB"/>
+                    </a:p>
+                  </a:txBody>
+                  <a:tcPr/>
+                </a:tc>
+                <a:tc>
+                  <a:txBody>
+                    <a:bodyPr/>
+                    <a:p>
+                      <a:pPr>
+                        <a:buNone/>
+                      </a:pPr>
+                      <a:r>
+                        <a:rPr lang="en-US" altLang="en-GB"/>
+                        <a:t>temperatura</a:t>
+                      </a:r>
+                      <a:endParaRPr lang="en-US" altLang="en-GB"/>
+                    </a:p>
+                  </a:txBody>
+                  <a:tcPr/>
+                </a:tc>
+              </a:tr>
+            </a:tbl>
+          </a:graphicData>
+        </a:graphic>
+      </p:graphicFrame>
+    </p:spTree>
+  </p:cSld>
+  <p:clrMapOvr>
+    <a:masterClrMapping/>
+  </p:clrMapOvr>
+</p:sld>
+</file>
+
+<file path=ppt/slides/slide7.xml><?xml version="1.0" encoding="utf-8"?>
+<p:sld xmlns:a="http://schemas.openxmlformats.org/drawingml/2006/main" xmlns:r="http://schemas.openxmlformats.org/officeDocument/2006/relationships" xmlns:p="http://schemas.openxmlformats.org/presentationml/2006/main">
+  <p:cSld>
+    <p:spTree>
+      <p:nvGrpSpPr>
+        <p:cNvPr id="1" name=""/>
+        <p:cNvGrpSpPr/>
+        <p:nvPr/>
+      </p:nvGrpSpPr>
+      <p:grpSpPr/>
+      <p:sp>
+        <p:nvSpPr>
+          <p:cNvPr id="2" name="Title 1"/>
+          <p:cNvSpPr>
+            <a:spLocks noGrp="1"/>
+          </p:cNvSpPr>
+          <p:nvPr>
+            <p:ph type="title"/>
+          </p:nvPr>
+        </p:nvSpPr>
+        <p:spPr/>
+        <p:txBody>
+          <a:bodyPr/>
+          <a:p>
+            <a:r>
+              <a:rPr lang="sr-Latn-RS" altLang="en-GB">
+                <a:sym typeface="+mn-ea"/>
+              </a:rPr>
+              <a:t>Semantika kolona </a:t>
+            </a:r>
+            <a:r>
+              <a:rPr lang="en-US" altLang="en-GB">
+                <a:sym typeface="+mn-ea"/>
+              </a:rPr>
+              <a:t>route_events.csv</a:t>
+            </a:r>
+            <a:endParaRPr lang="en-GB" altLang="en-US"/>
+          </a:p>
+        </p:txBody>
+      </p:sp>
+      <p:graphicFrame>
+        <p:nvGraphicFramePr>
+          <p:cNvPr id="4" name="Content Placeholder 3"/>
+          <p:cNvGraphicFramePr/>
+          <p:nvPr>
+            <p:ph idx="1"/>
+            <p:custDataLst>
+              <p:tags r:id="rId1"/>
+            </p:custDataLst>
+          </p:nvPr>
+        </p:nvGraphicFramePr>
+        <p:xfrm>
+          <a:off x="838200" y="1825625"/>
+          <a:ext cx="10515600" cy="4149090"/>
+        </p:xfrm>
+        <a:graphic>
+          <a:graphicData uri="http://schemas.openxmlformats.org/drawingml/2006/table">
+            <a:tbl>
+              <a:tblPr firstRow="1" bandRow="1">
+                <a:tableStyleId>{3B4B98B0-60AC-42C2-AFA5-B58CD77FA1E5}</a:tableStyleId>
+              </a:tblPr>
+              <a:tblGrid>
+                <a:gridCol w="2905125"/>
+                <a:gridCol w="7610475"/>
+              </a:tblGrid>
+              <a:tr h="377190">
+                <a:tc>
+                  <a:txBody>
+                    <a:bodyPr/>
+                    <a:p>
+                      <a:pPr>
+                        <a:buNone/>
+                      </a:pPr>
+                      <a:r>
+                        <a:rPr lang="en-US" altLang="en-GB" b="0"/>
+                        <a:t>humidity_pct</a:t>
+                      </a:r>
+                      <a:endParaRPr lang="en-US" altLang="en-GB" b="0"/>
+                    </a:p>
+                  </a:txBody>
+                  <a:tcPr/>
+                </a:tc>
+                <a:tc>
+                  <a:txBody>
+                    <a:bodyPr/>
+                    <a:p>
+                      <a:pPr>
+                        <a:buNone/>
+                      </a:pPr>
+                      <a:r>
+                        <a:rPr lang="en-US" altLang="en-GB" b="0"/>
+                        <a:t>vla</a:t>
+                      </a:r>
+                      <a:r>
+                        <a:rPr lang="" altLang="en-US" b="0"/>
+                        <a:t>ž</a:t>
+                      </a:r>
+                      <a:r>
+                        <a:rPr lang="en-US" altLang="en-GB" b="0"/>
+                        <a:t>nost vazduha</a:t>
+                      </a:r>
+                      <a:endParaRPr lang="en-US" altLang="en-GB" b="0"/>
+                    </a:p>
+                  </a:txBody>
+                  <a:tcPr/>
+                </a:tc>
+              </a:tr>
+              <a:tr h="377190">
+                <a:tc>
+                  <a:txBody>
+                    <a:bodyPr/>
+                    <a:p>
+                      <a:pPr>
+                        <a:buNone/>
+                      </a:pPr>
+                      <a:r>
+                        <a:rPr lang="en-US" altLang="en-GB"/>
+                        <a:t>shock_g</a:t>
+                      </a:r>
+                      <a:endParaRPr lang="en-US" altLang="en-GB"/>
+                    </a:p>
+                  </a:txBody>
+                  <a:tcPr/>
+                </a:tc>
+                <a:tc>
+                  <a:txBody>
+                    <a:bodyPr/>
+                    <a:p>
+                      <a:pPr>
+                        <a:buNone/>
+                      </a:pPr>
+                      <a:r>
+                        <a:rPr lang="en-US" altLang="en-GB"/>
+                        <a:t>nivo vibracija ili udara</a:t>
+                      </a:r>
+                      <a:endParaRPr lang="en-US" altLang="en-GB"/>
+                    </a:p>
+                  </a:txBody>
+                  <a:tcPr/>
+                </a:tc>
+              </a:tr>
+              <a:tr h="377190">
+                <a:tc>
+                  <a:txBody>
+                    <a:bodyPr/>
+                    <a:p>
+                      <a:pPr>
+                        <a:buNone/>
+                      </a:pPr>
+                      <a:r>
+                        <a:rPr lang="en-US" altLang="en-GB"/>
+                        <a:t>delay_added_hours </a:t>
+                      </a:r>
+                      <a:endParaRPr lang="en-US" altLang="en-GB"/>
+                    </a:p>
+                  </a:txBody>
+                  <a:tcPr/>
+                </a:tc>
+                <a:tc>
+                  <a:txBody>
+                    <a:bodyPr/>
+                    <a:p>
+                      <a:pPr>
+                        <a:buNone/>
+                      </a:pPr>
+                      <a:r>
+                        <a:rPr lang="en-US" altLang="en-GB"/>
+                        <a:t>dodatno ka</a:t>
+                      </a:r>
+                      <a:r>
+                        <a:rPr lang="" altLang="en-US"/>
+                        <a:t>š</a:t>
+                      </a:r>
+                      <a:r>
+                        <a:rPr lang="en-US" altLang="en-GB"/>
+                        <a:t>njenje izazvano doga</a:t>
+                      </a:r>
+                      <a:r>
+                        <a:rPr lang="" altLang="en-US"/>
+                        <a:t>đ</a:t>
+                      </a:r>
+                      <a:r>
+                        <a:rPr lang="en-US" altLang="en-GB"/>
+                        <a:t>ajem</a:t>
+                      </a:r>
+                      <a:endParaRPr lang="en-US" altLang="en-GB"/>
+                    </a:p>
+                  </a:txBody>
+                  <a:tcPr/>
+                </a:tc>
+              </a:tr>
+              <a:tr h="377190">
+                <a:tc>
+                  <a:txBody>
+                    <a:bodyPr/>
+                    <a:p>
+                      <a:pPr>
+                        <a:buNone/>
+                      </a:pPr>
+                      <a:r>
+                        <a:rPr lang="en-US" altLang="en-GB"/>
+                        <a:t>risk_score_delta</a:t>
+                      </a:r>
+                      <a:endParaRPr lang="en-US" altLang="en-GB"/>
+                    </a:p>
+                  </a:txBody>
+                  <a:tcPr/>
+                </a:tc>
+                <a:tc>
+                  <a:txBody>
+                    <a:bodyPr/>
+                    <a:p>
+                      <a:pPr>
+                        <a:buNone/>
+                      </a:pPr>
+                      <a:r>
+                        <a:rPr lang="en-US" altLang="en-GB"/>
+                        <a:t>promena nivoa rizika</a:t>
+                      </a:r>
+                      <a:endParaRPr lang="en-US" altLang="en-GB"/>
+                    </a:p>
+                  </a:txBody>
+                  <a:tcPr/>
+                </a:tc>
+              </a:tr>
+              <a:tr h="377190">
+                <a:tc>
+                  <a:txBody>
+                    <a:bodyPr/>
+                    <a:p>
+                      <a:pPr>
+                        <a:buNone/>
+                      </a:pPr>
+                      <a:r>
+                        <a:rPr lang="en-US" altLang="en-GB"/>
+                        <a:t>port_wait_hours</a:t>
+                      </a:r>
+                      <a:endParaRPr lang="en-US" altLang="en-GB"/>
+                    </a:p>
+                  </a:txBody>
+                  <a:tcPr/>
+                </a:tc>
+                <a:tc>
+                  <a:txBody>
+                    <a:bodyPr/>
+                    <a:p>
+                      <a:pPr>
+                        <a:buNone/>
+                      </a:pPr>
+                      <a:r>
+                        <a:rPr lang="en-US" altLang="en-GB"/>
+                        <a:t>vreme </a:t>
+                      </a:r>
+                      <a:r>
+                        <a:rPr lang="" altLang="en-US"/>
+                        <a:t>č</a:t>
+                      </a:r>
+                      <a:r>
+                        <a:rPr lang="en-US" altLang="en-GB"/>
+                        <a:t>ekanja u luci</a:t>
+                      </a:r>
+                      <a:endParaRPr lang="en-US" altLang="en-GB"/>
+                    </a:p>
+                  </a:txBody>
+                  <a:tcPr/>
+                </a:tc>
+              </a:tr>
+              <a:tr h="377190">
+                <a:tc>
+                  <a:txBody>
+                    <a:bodyPr/>
+                    <a:p>
+                      <a:pPr>
+                        <a:buNone/>
+                      </a:pPr>
+                      <a:r>
+                        <a:rPr lang="en-US" altLang="en-GB"/>
+                        <a:t>fuel_consumed_lt</a:t>
+                      </a:r>
+                      <a:endParaRPr lang="en-US" altLang="en-GB"/>
+                    </a:p>
+                  </a:txBody>
+                  <a:tcPr/>
+                </a:tc>
+                <a:tc>
+                  <a:txBody>
+                    <a:bodyPr/>
+                    <a:p>
+                      <a:pPr>
+                        <a:buNone/>
+                      </a:pPr>
+                      <a:r>
+                        <a:rPr lang="en-US" altLang="en-GB"/>
+                        <a:t>potro</a:t>
+                      </a:r>
+                      <a:r>
+                        <a:rPr lang="" altLang="en-US"/>
+                        <a:t>š</a:t>
+                      </a:r>
+                      <a:r>
+                        <a:rPr lang="en-US" altLang="en-GB"/>
+                        <a:t>nja goriva</a:t>
+                      </a:r>
+                      <a:endParaRPr lang="en-US" altLang="en-GB"/>
+                    </a:p>
+                  </a:txBody>
+                  <a:tcPr/>
+                </a:tc>
+              </a:tr>
+              <a:tr h="377190">
+                <a:tc>
+                  <a:txBody>
+                    <a:bodyPr/>
+                    <a:p>
+                      <a:pPr>
+                        <a:buNone/>
+                      </a:pPr>
+                      <a:r>
+                        <a:rPr lang="en-US" altLang="en-GB"/>
+                        <a:t>co2_kg</a:t>
+                      </a:r>
+                      <a:endParaRPr lang="en-US" altLang="en-GB"/>
+                    </a:p>
+                  </a:txBody>
+                  <a:tcPr/>
+                </a:tc>
+                <a:tc>
+                  <a:txBody>
+                    <a:bodyPr/>
+                    <a:p>
+                      <a:pPr>
+                        <a:buNone/>
+                      </a:pPr>
+                      <a:r>
+                        <a:rPr lang="en-US" altLang="en-GB"/>
+                        <a:t>emisija ugljen-dioksida</a:t>
+                      </a:r>
+                      <a:endParaRPr lang="en-US" altLang="en-GB"/>
+                    </a:p>
+                  </a:txBody>
+                  <a:tcPr/>
+                </a:tc>
+              </a:tr>
+              <a:tr h="377190">
+                <a:tc>
+                  <a:txBody>
+                    <a:bodyPr/>
+                    <a:p>
+                      <a:pPr>
+                        <a:buNone/>
+                      </a:pPr>
+                      <a:r>
+                        <a:rPr lang="en-US" altLang="en-GB"/>
+                        <a:t>sensor_type</a:t>
+                      </a:r>
+                      <a:endParaRPr lang="en-US" altLang="en-GB"/>
+                    </a:p>
+                  </a:txBody>
+                  <a:tcPr/>
+                </a:tc>
+                <a:tc>
+                  <a:txBody>
+                    <a:bodyPr/>
+                    <a:p>
+                      <a:pPr>
+                        <a:buNone/>
+                      </a:pPr>
+                      <a:r>
+                        <a:rPr lang="en-US" altLang="en-GB"/>
+                        <a:t>tip senzora</a:t>
+                      </a:r>
+                      <a:endParaRPr lang="en-US" altLang="en-GB"/>
+                    </a:p>
+                  </a:txBody>
+                  <a:tcPr/>
+                </a:tc>
+              </a:tr>
+              <a:tr h="377190">
+                <a:tc>
+                  <a:txBody>
+                    <a:bodyPr/>
+                    <a:p>
+                      <a:pPr>
+                        <a:buNone/>
+                      </a:pPr>
+                      <a:r>
+                        <a:rPr lang="en-US" altLang="en-GB"/>
+                        <a:t>signal_quality</a:t>
+                      </a:r>
+                      <a:endParaRPr lang="en-US" altLang="en-GB"/>
+                    </a:p>
+                  </a:txBody>
+                  <a:tcPr/>
+                </a:tc>
+                <a:tc>
+                  <a:txBody>
+                    <a:bodyPr/>
+                    <a:p>
+                      <a:pPr>
+                        <a:buNone/>
+                      </a:pPr>
+                      <a:r>
+                        <a:rPr lang="en-US" altLang="en-GB"/>
+                        <a:t>kvalitet signala</a:t>
+                      </a:r>
+                      <a:endParaRPr lang="en-US" altLang="en-GB"/>
+                    </a:p>
+                  </a:txBody>
+                  <a:tcPr/>
+                </a:tc>
+              </a:tr>
+              <a:tr h="377190">
+                <a:tc>
+                  <a:txBody>
+                    <a:bodyPr/>
+                    <a:p>
+                      <a:pPr>
+                        <a:buNone/>
+                      </a:pPr>
+                      <a:r>
+                        <a:rPr lang="en-US" altLang="en-GB"/>
+                        <a:t>anomaly_flag</a:t>
+                      </a:r>
+                      <a:endParaRPr lang="en-US" altLang="en-GB"/>
+                    </a:p>
+                  </a:txBody>
+                  <a:tcPr/>
+                </a:tc>
+                <a:tc>
+                  <a:txBody>
+                    <a:bodyPr/>
+                    <a:p>
+                      <a:pPr>
+                        <a:buNone/>
+                      </a:pPr>
+                      <a:r>
+                        <a:rPr lang="en-US" altLang="en-GB"/>
+                        <a:t>indikator anomalije</a:t>
+                      </a:r>
+                      <a:endParaRPr lang="en-US" altLang="en-GB"/>
+                    </a:p>
+                  </a:txBody>
+                  <a:tcPr/>
+                </a:tc>
+              </a:tr>
+              <a:tr h="377190">
+                <a:tc>
+                  <a:txBody>
+                    <a:bodyPr/>
+                    <a:p>
+                      <a:pPr>
+                        <a:buNone/>
+                      </a:pPr>
+                      <a:r>
+                        <a:rPr lang="en-US" altLang="en-GB"/>
+                        <a:t>alert_sent </a:t>
+                      </a:r>
+                      <a:endParaRPr lang="en-US" altLang="en-GB"/>
+                    </a:p>
+                  </a:txBody>
+                  <a:tcPr/>
+                </a:tc>
+                <a:tc>
+                  <a:txBody>
+                    <a:bodyPr/>
+                    <a:p>
+                      <a:pPr>
+                        <a:buNone/>
+                      </a:pPr>
+                      <a:r>
+                        <a:rPr lang="en-US" altLang="en-GB"/>
+                        <a:t>indikator poslatog upozorenja </a:t>
+                      </a:r>
+                      <a:endParaRPr lang="en-US" altLang="en-GB"/>
+                    </a:p>
+                  </a:txBody>
+                  <a:tcPr/>
+                </a:tc>
+              </a:tr>
+            </a:tbl>
+          </a:graphicData>
+        </a:graphic>
+      </p:graphicFrame>
+    </p:spTree>
+  </p:cSld>
+  <p:clrMapOvr>
+    <a:masterClrMapping/>
+  </p:clrMapOvr>
+</p:sld>
+</file>
+
+<file path=ppt/slides/slide8.xml><?xml version="1.0" encoding="utf-8"?>
+<p:sld xmlns:a="http://schemas.openxmlformats.org/drawingml/2006/main" xmlns:r="http://schemas.openxmlformats.org/officeDocument/2006/relationships" xmlns:p="http://schemas.openxmlformats.org/presentationml/2006/main">
+  <p:cSld>
+    <p:spTree>
+      <p:nvGrpSpPr>
+        <p:cNvPr id="1" name=""/>
+        <p:cNvGrpSpPr/>
+        <p:nvPr/>
+      </p:nvGrpSpPr>
+      <p:grpSpPr/>
+      <p:sp>
+        <p:nvSpPr>
+          <p:cNvPr id="2" name="Title 1"/>
+          <p:cNvSpPr>
+            <a:spLocks noGrp="1"/>
+          </p:cNvSpPr>
+          <p:nvPr>
+            <p:ph type="title"/>
+          </p:nvPr>
+        </p:nvSpPr>
+        <p:spPr/>
+        <p:txBody>
+          <a:bodyPr/>
+          <a:p>
+            <a:r>
+              <a:rPr lang="en-US" altLang="en-GB"/>
+              <a:t>Predlog logi</a:t>
+            </a:r>
+            <a:r>
+              <a:rPr lang="sr-Latn-RS" altLang="en-GB"/>
+              <a:t>čke šeme</a:t>
+            </a:r>
+            <a:endParaRPr lang="sr-Latn-RS" altLang="en-GB"/>
+          </a:p>
+        </p:txBody>
+      </p:sp>
       <p:sp>
         <p:nvSpPr>
           <p:cNvPr id="3" name="Content Placeholder 2"/>
@@ -4079,6 +4991,20 @@
 <p:tagLst xmlns:p="http://schemas.openxmlformats.org/presentationml/2006/main">
   <p:tag name="TABLE_ENDDRAG_ORIGIN_RECT" val="622*322"/>
   <p:tag name="TABLE_ENDDRAG_RECT" val="66*153*622*322"/>
+</p:tagLst>
+</file>
+
+<file path=ppt/tags/tag3.xml><?xml version="1.0" encoding="utf-8"?>
+<p:tagLst xmlns:p="http://schemas.openxmlformats.org/presentationml/2006/main">
+  <p:tag name="TABLE_ENDDRAG_ORIGIN_RECT" val="622*237"/>
+  <p:tag name="TABLE_ENDDRAG_RECT" val="66*146*622*237"/>
+</p:tagLst>
+</file>
+
+<file path=ppt/tags/tag4.xml><?xml version="1.0" encoding="utf-8"?>
+<p:tagLst xmlns:p="http://schemas.openxmlformats.org/presentationml/2006/main">
+  <p:tag name="TABLE_ENDDRAG_ORIGIN_RECT" val="622*237"/>
+  <p:tag name="TABLE_ENDDRAG_RECT" val="66*146*622*237"/>
 </p:tagLst>
 </file>
 

--- a/Analiza pametne logistike globalnog uvoza (1).pptx
+++ b/Analiza pametne logistike globalnog uvoza (1).pptx
@@ -12,7 +12,8 @@
     <p:sldId id="260" r:id="rId7"/>
     <p:sldId id="261" r:id="rId8"/>
     <p:sldId id="262" r:id="rId9"/>
-    <p:sldId id="263" r:id="rId10"/>
+    <p:sldId id="264" r:id="rId10"/>
+    <p:sldId id="263" r:id="rId11"/>
   </p:sldIdLst>
   <p:sldSz cx="12192000" cy="6858000"/>
   <p:notesSz cx="6858000" cy="9144000"/>
@@ -131,8 +132,16 @@
 </file>
 
 <file path=ppt/slideLayouts/slideLayout1.xml><?xml version="1.0" encoding="utf-8"?>
-<p:sldLayout xmlns:a="http://schemas.openxmlformats.org/drawingml/2006/main" xmlns:r="http://schemas.openxmlformats.org/officeDocument/2006/relationships" xmlns:p="http://schemas.openxmlformats.org/presentationml/2006/main" type="title" preserve="1">
+<p:sldLayout xmlns:a="http://schemas.openxmlformats.org/drawingml/2006/main" xmlns:r="http://schemas.openxmlformats.org/officeDocument/2006/relationships" xmlns:p="http://schemas.openxmlformats.org/presentationml/2006/main" type="title" preserve="1" showMasterSp="0">
   <p:cSld name="Title Slide">
+    <p:bg>
+      <p:bgPr>
+        <a:solidFill>
+          <a:schemeClr val="bg1"/>
+        </a:solidFill>
+        <a:effectLst/>
+      </p:bgPr>
+    </p:bg>
     <p:spTree>
       <p:nvGrpSpPr>
         <p:cNvPr id="1" name=""/>
@@ -147,43 +156,73 @@
           <a:chExt cx="0" cy="0"/>
         </a:xfrm>
       </p:grpSpPr>
-      <p:sp>
-        <p:nvSpPr>
-          <p:cNvPr id="2" name="Title 1"/>
-          <p:cNvSpPr>
-            <a:spLocks noGrp="1"/>
-          </p:cNvSpPr>
-          <p:nvPr>
-            <p:ph type="ctrTitle"/>
-          </p:nvPr>
-        </p:nvSpPr>
+      <p:pic>
+        <p:nvPicPr>
+          <p:cNvPr id="2050" name="Picture 2"/>
+          <p:cNvPicPr>
+            <a:picLocks noChangeAspect="1"/>
+          </p:cNvPicPr>
+          <p:nvPr/>
+        </p:nvPicPr>
+        <p:blipFill>
+          <a:blip r:embed="rId2"/>
+          <a:srcRect b="3795"/>
+          <a:stretch>
+            <a:fillRect/>
+          </a:stretch>
+        </p:blipFill>
         <p:spPr>
           <a:xfrm>
-            <a:off x="1524000" y="1122363"/>
-            <a:ext cx="9144000" cy="2387600"/>
+            <a:off x="0" y="260350"/>
+            <a:ext cx="12192000" cy="6597650"/>
+          </a:xfrm>
+          <a:prstGeom prst="rect">
+            <a:avLst/>
+          </a:prstGeom>
+          <a:noFill/>
+          <a:ln w="9525">
+            <a:noFill/>
+          </a:ln>
+        </p:spPr>
+      </p:pic>
+      <p:sp>
+        <p:nvSpPr>
+          <p:cNvPr id="2051" name="Rectangle 3"/>
+          <p:cNvSpPr>
+            <a:spLocks noGrp="1" noChangeArrowheads="1"/>
+          </p:cNvSpPr>
+          <p:nvPr>
+            <p:ph type="ctrTitle"/>
+          </p:nvPr>
+        </p:nvSpPr>
+        <p:spPr>
+          <a:xfrm>
+            <a:off x="624417" y="620713"/>
+            <a:ext cx="10943167" cy="1082675"/>
           </a:xfrm>
         </p:spPr>
         <p:txBody>
-          <a:bodyPr anchor="b"/>
+          <a:bodyPr/>
           <a:lstStyle>
-            <a:lvl1pPr algn="ctr">
-              <a:defRPr sz="6000"/>
+            <a:lvl1pPr>
+              <a:defRPr/>
             </a:lvl1pPr>
           </a:lstStyle>
           <a:p>
-            <a:r>
-              <a:rPr lang="en-US" smtClean="0"/>
+            <a:pPr lvl="0"/>
+            <a:r>
+              <a:rPr lang="en-US" altLang="zh-CN" noProof="0" smtClean="0"/>
               <a:t>Click to edit Master title style</a:t>
             </a:r>
-            <a:endParaRPr lang="en-US"/>
-          </a:p>
-        </p:txBody>
-      </p:sp>
-      <p:sp>
-        <p:nvSpPr>
-          <p:cNvPr id="3" name="Subtitle 2"/>
-          <p:cNvSpPr>
-            <a:spLocks noGrp="1"/>
+            <a:endParaRPr lang="en-US" altLang="zh-CN" noProof="0" smtClean="0"/>
+          </a:p>
+        </p:txBody>
+      </p:sp>
+      <p:sp>
+        <p:nvSpPr>
+          <p:cNvPr id="2052" name="Rectangle 4"/>
+          <p:cNvSpPr>
+            <a:spLocks noGrp="1" noChangeArrowheads="1"/>
           </p:cNvSpPr>
           <p:nvPr>
             <p:ph type="subTitle" idx="1"/>
@@ -191,73 +230,84 @@
         </p:nvSpPr>
         <p:spPr>
           <a:xfrm>
-            <a:off x="1524000" y="3602038"/>
-            <a:ext cx="9144000" cy="1655762"/>
+            <a:off x="626533" y="1843088"/>
+            <a:ext cx="10949517" cy="981075"/>
           </a:xfrm>
         </p:spPr>
         <p:txBody>
           <a:bodyPr/>
           <a:lstStyle>
-            <a:lvl1pPr marL="0" indent="0" algn="ctr">
+            <a:lvl1pPr marL="0" indent="0">
+              <a:buFontTx/>
               <a:buNone/>
-              <a:defRPr sz="2400"/>
+              <a:defRPr/>
             </a:lvl1pPr>
-            <a:lvl2pPr marL="457200" indent="0" algn="ctr">
-              <a:buNone/>
-              <a:defRPr sz="2000"/>
-            </a:lvl2pPr>
-            <a:lvl3pPr marL="914400" indent="0" algn="ctr">
-              <a:buNone/>
-              <a:defRPr sz="1800"/>
-            </a:lvl3pPr>
-            <a:lvl4pPr marL="1371600" indent="0" algn="ctr">
-              <a:buNone/>
-              <a:defRPr sz="1600"/>
-            </a:lvl4pPr>
-            <a:lvl5pPr marL="1828800" indent="0" algn="ctr">
-              <a:buNone/>
-              <a:defRPr sz="1600"/>
-            </a:lvl5pPr>
-            <a:lvl6pPr marL="2286000" indent="0" algn="ctr">
-              <a:buNone/>
-              <a:defRPr sz="1600"/>
-            </a:lvl6pPr>
-            <a:lvl7pPr marL="2743200" indent="0" algn="ctr">
-              <a:buNone/>
-              <a:defRPr sz="1600"/>
-            </a:lvl7pPr>
-            <a:lvl8pPr marL="3200400" indent="0" algn="ctr">
-              <a:buNone/>
-              <a:defRPr sz="1600"/>
-            </a:lvl8pPr>
-            <a:lvl9pPr marL="3657600" indent="0" algn="ctr">
-              <a:buNone/>
-              <a:defRPr sz="1600"/>
-            </a:lvl9pPr>
           </a:lstStyle>
           <a:p>
-            <a:r>
-              <a:rPr lang="en-US" smtClean="0"/>
+            <a:pPr lvl="0"/>
+            <a:r>
+              <a:rPr lang="en-US" altLang="zh-CN" noProof="0" smtClean="0"/>
               <a:t>Click to edit Master subtitle style</a:t>
             </a:r>
-            <a:endParaRPr lang="en-US"/>
-          </a:p>
-        </p:txBody>
-      </p:sp>
-      <p:sp>
-        <p:nvSpPr>
-          <p:cNvPr id="4" name="Date Placeholder 3"/>
-          <p:cNvSpPr>
-            <a:spLocks noGrp="1"/>
-          </p:cNvSpPr>
-          <p:nvPr>
-            <p:ph type="dt" sz="half" idx="10"/>
-          </p:nvPr>
-        </p:nvSpPr>
-        <p:spPr/>
-        <p:txBody>
-          <a:bodyPr/>
-          <a:lstStyle/>
+            <a:endParaRPr lang="en-US" altLang="zh-CN" noProof="0" smtClean="0"/>
+          </a:p>
+        </p:txBody>
+      </p:sp>
+      <p:sp>
+        <p:nvSpPr>
+          <p:cNvPr id="9" name="Rectangle 5"/>
+          <p:cNvSpPr>
+            <a:spLocks noGrp="1" noChangeArrowheads="1"/>
+          </p:cNvSpPr>
+          <p:nvPr>
+            <p:ph type="dt" sz="half" idx="2"/>
+          </p:nvPr>
+        </p:nvSpPr>
+        <p:spPr bwMode="auto">
+          <a:xfrm>
+            <a:off x="609600" y="6245225"/>
+            <a:ext cx="2844800" cy="476250"/>
+          </a:xfrm>
+          <a:prstGeom prst="rect">
+            <a:avLst/>
+          </a:prstGeom>
+          <a:noFill/>
+          <a:extLst>
+            <a:ext uri="{909E8E84-426E-40DD-AFC4-6F175D3DCCD1}">
+              <a14:hiddenFill xmlns:a14="http://schemas.microsoft.com/office/drawing/2010/main">
+                <a:solidFill>
+                  <a:schemeClr val="accent1"/>
+                </a:solidFill>
+              </a14:hiddenFill>
+            </a:ext>
+            <a:ext uri="{91240B29-F687-4F45-9708-019B960494DF}">
+              <a14:hiddenLine xmlns:a14="http://schemas.microsoft.com/office/drawing/2010/main" w="9525">
+                <a:solidFill>
+                  <a:srgbClr val="000000"/>
+                </a:solidFill>
+                <a:miter lim="800000"/>
+                <a:headEnd/>
+                <a:tailEnd/>
+              </a14:hiddenLine>
+            </a:ext>
+            <a:ext uri="{AF507438-7753-43E0-B8FC-AC1667EBCBE1}">
+              <a14:hiddenEffects xmlns:a14="http://schemas.microsoft.com/office/drawing/2010/main">
+                <a:effectLst>
+                  <a:outerShdw dist="35921" dir="2700000" algn="ctr" rotWithShape="0">
+                    <a:schemeClr val="bg2"/>
+                  </a:outerShdw>
+                </a:effectLst>
+              </a14:hiddenEffects>
+            </a:ext>
+          </a:extLst>
+        </p:spPr>
+        <p:txBody>
+          <a:bodyPr vert="horz" wrap="square" lIns="91440" tIns="45720" rIns="91440" bIns="45720" numCol="1" anchor="t" anchorCtr="0" compatLnSpc="1"/>
+          <a:lstStyle>
+            <a:lvl1pPr>
+              <a:defRPr/>
+            </a:lvl1pPr>
+          </a:lstStyle>
           <a:p>
             <a:fld id="{63A1C593-65D0-4073-BCC9-577B9352EA97}" type="datetimeFigureOut">
               <a:rPr lang="en-US" smtClean="0"/>
@@ -268,18 +318,59 @@
       </p:sp>
       <p:sp>
         <p:nvSpPr>
-          <p:cNvPr id="5" name="Footer Placeholder 4"/>
-          <p:cNvSpPr>
-            <a:spLocks noGrp="1"/>
-          </p:cNvSpPr>
-          <p:nvPr>
-            <p:ph type="ftr" sz="quarter" idx="11"/>
-          </p:nvPr>
-        </p:nvSpPr>
-        <p:spPr/>
-        <p:txBody>
-          <a:bodyPr/>
-          <a:lstStyle/>
+          <p:cNvPr id="10" name="Rectangle 6"/>
+          <p:cNvSpPr>
+            <a:spLocks noGrp="1" noChangeArrowheads="1"/>
+          </p:cNvSpPr>
+          <p:nvPr>
+            <p:ph type="ftr" sz="quarter" idx="3"/>
+          </p:nvPr>
+        </p:nvSpPr>
+        <p:spPr bwMode="auto">
+          <a:xfrm>
+            <a:off x="4165600" y="6245225"/>
+            <a:ext cx="3860800" cy="476250"/>
+          </a:xfrm>
+          <a:prstGeom prst="rect">
+            <a:avLst/>
+          </a:prstGeom>
+          <a:noFill/>
+          <a:extLst>
+            <a:ext uri="{909E8E84-426E-40DD-AFC4-6F175D3DCCD1}">
+              <a14:hiddenFill xmlns:a14="http://schemas.microsoft.com/office/drawing/2010/main">
+                <a:solidFill>
+                  <a:schemeClr val="accent1"/>
+                </a:solidFill>
+              </a14:hiddenFill>
+            </a:ext>
+            <a:ext uri="{91240B29-F687-4F45-9708-019B960494DF}">
+              <a14:hiddenLine xmlns:a14="http://schemas.microsoft.com/office/drawing/2010/main" w="9525">
+                <a:solidFill>
+                  <a:srgbClr val="000000"/>
+                </a:solidFill>
+                <a:miter lim="800000"/>
+                <a:headEnd/>
+                <a:tailEnd/>
+              </a14:hiddenLine>
+            </a:ext>
+            <a:ext uri="{AF507438-7753-43E0-B8FC-AC1667EBCBE1}">
+              <a14:hiddenEffects xmlns:a14="http://schemas.microsoft.com/office/drawing/2010/main">
+                <a:effectLst>
+                  <a:outerShdw dist="35921" dir="2700000" algn="ctr" rotWithShape="0">
+                    <a:schemeClr val="bg2"/>
+                  </a:outerShdw>
+                </a:effectLst>
+              </a14:hiddenEffects>
+            </a:ext>
+          </a:extLst>
+        </p:spPr>
+        <p:txBody>
+          <a:bodyPr vert="horz" wrap="square" lIns="91440" tIns="45720" rIns="91440" bIns="45720" numCol="1" anchor="t" anchorCtr="0" compatLnSpc="1"/>
+          <a:lstStyle>
+            <a:lvl1pPr>
+              <a:defRPr/>
+            </a:lvl1pPr>
+          </a:lstStyle>
           <a:p>
             <a:endParaRPr lang="en-US"/>
           </a:p>
@@ -287,18 +378,59 @@
       </p:sp>
       <p:sp>
         <p:nvSpPr>
-          <p:cNvPr id="6" name="Slide Number Placeholder 5"/>
-          <p:cNvSpPr>
-            <a:spLocks noGrp="1"/>
-          </p:cNvSpPr>
-          <p:nvPr>
-            <p:ph type="sldNum" sz="quarter" idx="12"/>
-          </p:nvPr>
-        </p:nvSpPr>
-        <p:spPr/>
-        <p:txBody>
-          <a:bodyPr/>
-          <a:lstStyle/>
+          <p:cNvPr id="11" name="Rectangle 7"/>
+          <p:cNvSpPr>
+            <a:spLocks noGrp="1" noChangeArrowheads="1"/>
+          </p:cNvSpPr>
+          <p:nvPr>
+            <p:ph type="sldNum" sz="quarter" idx="4"/>
+          </p:nvPr>
+        </p:nvSpPr>
+        <p:spPr bwMode="auto">
+          <a:xfrm>
+            <a:off x="8737600" y="6245225"/>
+            <a:ext cx="2844800" cy="476250"/>
+          </a:xfrm>
+          <a:prstGeom prst="rect">
+            <a:avLst/>
+          </a:prstGeom>
+          <a:noFill/>
+          <a:extLst>
+            <a:ext uri="{909E8E84-426E-40DD-AFC4-6F175D3DCCD1}">
+              <a14:hiddenFill xmlns:a14="http://schemas.microsoft.com/office/drawing/2010/main">
+                <a:solidFill>
+                  <a:schemeClr val="accent1"/>
+                </a:solidFill>
+              </a14:hiddenFill>
+            </a:ext>
+            <a:ext uri="{91240B29-F687-4F45-9708-019B960494DF}">
+              <a14:hiddenLine xmlns:a14="http://schemas.microsoft.com/office/drawing/2010/main" w="9525">
+                <a:solidFill>
+                  <a:srgbClr val="000000"/>
+                </a:solidFill>
+                <a:miter lim="800000"/>
+                <a:headEnd/>
+                <a:tailEnd/>
+              </a14:hiddenLine>
+            </a:ext>
+            <a:ext uri="{AF507438-7753-43E0-B8FC-AC1667EBCBE1}">
+              <a14:hiddenEffects xmlns:a14="http://schemas.microsoft.com/office/drawing/2010/main">
+                <a:effectLst>
+                  <a:outerShdw dist="35921" dir="2700000" algn="ctr" rotWithShape="0">
+                    <a:schemeClr val="bg2"/>
+                  </a:outerShdw>
+                </a:effectLst>
+              </a14:hiddenEffects>
+            </a:ext>
+          </a:extLst>
+        </p:spPr>
+        <p:txBody>
+          <a:bodyPr vert="horz" wrap="square" lIns="91440" tIns="45720" rIns="91440" bIns="45720" numCol="1" anchor="t" anchorCtr="0" compatLnSpc="1"/>
+          <a:lstStyle>
+            <a:lvl1pPr>
+              <a:defRPr/>
+            </a:lvl1pPr>
+          </a:lstStyle>
           <a:p>
             <a:fld id="{9B618960-8005-486C-9A75-10CB2AAC16F9}" type="slidenum">
               <a:rPr lang="en-US" smtClean="0"/>
@@ -312,6 +444,7 @@
   <p:clrMapOvr>
     <a:masterClrMapping/>
   </p:clrMapOvr>
+  <p:hf sldNum="0" hdr="0" ftr="0" dt="0"/>
 </p:sldLayout>
 </file>
 
@@ -424,7 +557,6 @@
         <p:spPr/>
         <p:txBody>
           <a:bodyPr/>
-          <a:lstStyle/>
           <a:p>
             <a:fld id="{63A1C593-65D0-4073-BCC9-577B9352EA97}" type="datetimeFigureOut">
               <a:rPr lang="en-US" smtClean="0"/>
@@ -446,7 +578,6 @@
         <p:spPr/>
         <p:txBody>
           <a:bodyPr/>
-          <a:lstStyle/>
           <a:p>
             <a:endParaRPr lang="en-US"/>
           </a:p>
@@ -465,7 +596,6 @@
         <p:spPr/>
         <p:txBody>
           <a:bodyPr/>
-          <a:lstStyle/>
           <a:p>
             <a:fld id="{9B618960-8005-486C-9A75-10CB2AAC16F9}" type="slidenum">
               <a:rPr lang="en-US" smtClean="0"/>
@@ -479,6 +609,7 @@
   <p:clrMapOvr>
     <a:masterClrMapping/>
   </p:clrMapOvr>
+  <p:hf sldNum="0" hdr="0" ftr="0" dt="0"/>
 </p:sldLayout>
 </file>
 
@@ -511,8 +642,8 @@
         </p:nvSpPr>
         <p:spPr>
           <a:xfrm>
-            <a:off x="8724900" y="365125"/>
-            <a:ext cx="2628900" cy="5811838"/>
+            <a:off x="8839200" y="190500"/>
+            <a:ext cx="2743200" cy="5937250"/>
           </a:xfrm>
         </p:spPr>
         <p:txBody>
@@ -539,8 +670,8 @@
         </p:nvSpPr>
         <p:spPr>
           <a:xfrm>
-            <a:off x="838200" y="365125"/>
-            <a:ext cx="7734300" cy="5811838"/>
+            <a:off x="609600" y="190500"/>
+            <a:ext cx="8026400" cy="5937250"/>
           </a:xfrm>
         </p:spPr>
         <p:txBody>
@@ -601,7 +732,6 @@
         <p:spPr/>
         <p:txBody>
           <a:bodyPr/>
-          <a:lstStyle/>
           <a:p>
             <a:fld id="{63A1C593-65D0-4073-BCC9-577B9352EA97}" type="datetimeFigureOut">
               <a:rPr lang="en-US" smtClean="0"/>
@@ -623,7 +753,6 @@
         <p:spPr/>
         <p:txBody>
           <a:bodyPr/>
-          <a:lstStyle/>
           <a:p>
             <a:endParaRPr lang="en-US"/>
           </a:p>
@@ -642,7 +771,6 @@
         <p:spPr/>
         <p:txBody>
           <a:bodyPr/>
-          <a:lstStyle/>
           <a:p>
             <a:fld id="{9B618960-8005-486C-9A75-10CB2AAC16F9}" type="slidenum">
               <a:rPr lang="en-US" smtClean="0"/>
@@ -656,6 +784,7 @@
   <p:clrMapOvr>
     <a:masterClrMapping/>
   </p:clrMapOvr>
+  <p:hf sldNum="0" hdr="0" ftr="0" dt="0"/>
 </p:sldLayout>
 </file>
 
@@ -768,7 +897,6 @@
         <p:spPr/>
         <p:txBody>
           <a:bodyPr/>
-          <a:lstStyle/>
           <a:p>
             <a:fld id="{63A1C593-65D0-4073-BCC9-577B9352EA97}" type="datetimeFigureOut">
               <a:rPr lang="en-US" smtClean="0"/>
@@ -790,7 +918,6 @@
         <p:spPr/>
         <p:txBody>
           <a:bodyPr/>
-          <a:lstStyle/>
           <a:p>
             <a:endParaRPr lang="en-US"/>
           </a:p>
@@ -809,7 +936,6 @@
         <p:spPr/>
         <p:txBody>
           <a:bodyPr/>
-          <a:lstStyle/>
           <a:p>
             <a:fld id="{9B618960-8005-486C-9A75-10CB2AAC16F9}" type="slidenum">
               <a:rPr lang="en-US" smtClean="0"/>
@@ -823,6 +949,7 @@
   <p:clrMapOvr>
     <a:masterClrMapping/>
   </p:clrMapOvr>
+  <p:hf sldNum="0" hdr="0" ftr="0" dt="0"/>
 </p:sldLayout>
 </file>
 
@@ -855,7 +982,7 @@
         </p:nvSpPr>
         <p:spPr>
           <a:xfrm>
-            <a:off x="831850" y="1709738"/>
+            <a:off x="831851" y="1709738"/>
             <a:ext cx="10515600" cy="2852737"/>
           </a:xfrm>
         </p:spPr>
@@ -887,7 +1014,7 @@
         </p:nvSpPr>
         <p:spPr>
           <a:xfrm>
-            <a:off x="831850" y="4589463"/>
+            <a:off x="831851" y="4589463"/>
             <a:ext cx="10515600" cy="1500187"/>
           </a:xfrm>
         </p:spPr>
@@ -896,93 +1023,39 @@
           <a:lstStyle>
             <a:lvl1pPr marL="0" indent="0">
               <a:buNone/>
-              <a:defRPr sz="2400">
-                <a:solidFill>
-                  <a:schemeClr val="tx1">
-                    <a:tint val="75000"/>
-                  </a:schemeClr>
-                </a:solidFill>
-              </a:defRPr>
+              <a:defRPr sz="2400"/>
             </a:lvl1pPr>
             <a:lvl2pPr marL="457200" indent="0">
               <a:buNone/>
-              <a:defRPr sz="2000">
-                <a:solidFill>
-                  <a:schemeClr val="tx1">
-                    <a:tint val="75000"/>
-                  </a:schemeClr>
-                </a:solidFill>
-              </a:defRPr>
+              <a:defRPr sz="2000"/>
             </a:lvl2pPr>
             <a:lvl3pPr marL="914400" indent="0">
               <a:buNone/>
-              <a:defRPr sz="1800">
-                <a:solidFill>
-                  <a:schemeClr val="tx1">
-                    <a:tint val="75000"/>
-                  </a:schemeClr>
-                </a:solidFill>
-              </a:defRPr>
+              <a:defRPr sz="1800"/>
             </a:lvl3pPr>
             <a:lvl4pPr marL="1371600" indent="0">
               <a:buNone/>
-              <a:defRPr sz="1600">
-                <a:solidFill>
-                  <a:schemeClr val="tx1">
-                    <a:tint val="75000"/>
-                  </a:schemeClr>
-                </a:solidFill>
-              </a:defRPr>
+              <a:defRPr sz="1600"/>
             </a:lvl4pPr>
             <a:lvl5pPr marL="1828800" indent="0">
               <a:buNone/>
-              <a:defRPr sz="1600">
-                <a:solidFill>
-                  <a:schemeClr val="tx1">
-                    <a:tint val="75000"/>
-                  </a:schemeClr>
-                </a:solidFill>
-              </a:defRPr>
+              <a:defRPr sz="1600"/>
             </a:lvl5pPr>
             <a:lvl6pPr marL="2286000" indent="0">
               <a:buNone/>
-              <a:defRPr sz="1600">
-                <a:solidFill>
-                  <a:schemeClr val="tx1">
-                    <a:tint val="75000"/>
-                  </a:schemeClr>
-                </a:solidFill>
-              </a:defRPr>
+              <a:defRPr sz="1600"/>
             </a:lvl6pPr>
             <a:lvl7pPr marL="2743200" indent="0">
               <a:buNone/>
-              <a:defRPr sz="1600">
-                <a:solidFill>
-                  <a:schemeClr val="tx1">
-                    <a:tint val="75000"/>
-                  </a:schemeClr>
-                </a:solidFill>
-              </a:defRPr>
+              <a:defRPr sz="1600"/>
             </a:lvl7pPr>
             <a:lvl8pPr marL="3200400" indent="0">
               <a:buNone/>
-              <a:defRPr sz="1600">
-                <a:solidFill>
-                  <a:schemeClr val="tx1">
-                    <a:tint val="75000"/>
-                  </a:schemeClr>
-                </a:solidFill>
-              </a:defRPr>
+              <a:defRPr sz="1600"/>
             </a:lvl8pPr>
             <a:lvl9pPr marL="3657600" indent="0">
               <a:buNone/>
-              <a:defRPr sz="1600">
-                <a:solidFill>
-                  <a:schemeClr val="tx1">
-                    <a:tint val="75000"/>
-                  </a:schemeClr>
-                </a:solidFill>
-              </a:defRPr>
+              <a:defRPr sz="1600"/>
             </a:lvl9pPr>
           </a:lstStyle>
           <a:p>
@@ -1008,7 +1081,6 @@
         <p:spPr/>
         <p:txBody>
           <a:bodyPr/>
-          <a:lstStyle/>
           <a:p>
             <a:fld id="{63A1C593-65D0-4073-BCC9-577B9352EA97}" type="datetimeFigureOut">
               <a:rPr lang="en-US" smtClean="0"/>
@@ -1030,7 +1102,6 @@
         <p:spPr/>
         <p:txBody>
           <a:bodyPr/>
-          <a:lstStyle/>
           <a:p>
             <a:endParaRPr lang="en-US"/>
           </a:p>
@@ -1049,7 +1120,6 @@
         <p:spPr/>
         <p:txBody>
           <a:bodyPr/>
-          <a:lstStyle/>
           <a:p>
             <a:fld id="{9B618960-8005-486C-9A75-10CB2AAC16F9}" type="slidenum">
               <a:rPr lang="en-US" smtClean="0"/>
@@ -1063,6 +1133,7 @@
   <p:clrMapOvr>
     <a:masterClrMapping/>
   </p:clrMapOvr>
+  <p:hf sldNum="0" hdr="0" ftr="0" dt="0"/>
 </p:sldLayout>
 </file>
 
@@ -1118,8 +1189,8 @@
         </p:nvSpPr>
         <p:spPr>
           <a:xfrm>
-            <a:off x="838200" y="1825625"/>
-            <a:ext cx="5181600" cy="4351338"/>
+            <a:off x="609600" y="1174750"/>
+            <a:ext cx="5384800" cy="4953000"/>
           </a:xfrm>
         </p:spPr>
         <p:txBody>
@@ -1179,8 +1250,8 @@
         </p:nvSpPr>
         <p:spPr>
           <a:xfrm>
-            <a:off x="6172200" y="1825625"/>
-            <a:ext cx="5181600" cy="4351338"/>
+            <a:off x="6197600" y="1174750"/>
+            <a:ext cx="5384800" cy="4953000"/>
           </a:xfrm>
         </p:spPr>
         <p:txBody>
@@ -1241,7 +1312,6 @@
         <p:spPr/>
         <p:txBody>
           <a:bodyPr/>
-          <a:lstStyle/>
           <a:p>
             <a:fld id="{63A1C593-65D0-4073-BCC9-577B9352EA97}" type="datetimeFigureOut">
               <a:rPr lang="en-US" smtClean="0"/>
@@ -1263,7 +1333,6 @@
         <p:spPr/>
         <p:txBody>
           <a:bodyPr/>
-          <a:lstStyle/>
           <a:p>
             <a:endParaRPr lang="en-US"/>
           </a:p>
@@ -1282,7 +1351,6 @@
         <p:spPr/>
         <p:txBody>
           <a:bodyPr/>
-          <a:lstStyle/>
           <a:p>
             <a:fld id="{9B618960-8005-486C-9A75-10CB2AAC16F9}" type="slidenum">
               <a:rPr lang="en-US" smtClean="0"/>
@@ -1296,6 +1364,7 @@
   <p:clrMapOvr>
     <a:masterClrMapping/>
   </p:clrMapOvr>
+  <p:hf sldNum="0" hdr="0" ftr="0" dt="0"/>
 </p:sldLayout>
 </file>
 
@@ -1328,7 +1397,7 @@
         </p:nvSpPr>
         <p:spPr>
           <a:xfrm>
-            <a:off x="839788" y="365125"/>
+            <a:off x="840317" y="365125"/>
             <a:ext cx="10515600" cy="1325563"/>
           </a:xfrm>
         </p:spPr>
@@ -1356,8 +1425,8 @@
         </p:nvSpPr>
         <p:spPr>
           <a:xfrm>
-            <a:off x="839788" y="1681163"/>
-            <a:ext cx="5157787" cy="823912"/>
+            <a:off x="840317" y="1681163"/>
+            <a:ext cx="5158316" cy="823912"/>
           </a:xfrm>
         </p:spPr>
         <p:txBody>
@@ -1422,8 +1491,8 @@
         </p:nvSpPr>
         <p:spPr>
           <a:xfrm>
-            <a:off x="839788" y="2505075"/>
-            <a:ext cx="5157787" cy="3684588"/>
+            <a:off x="840317" y="2505075"/>
+            <a:ext cx="5158316" cy="3684588"/>
           </a:xfrm>
         </p:spPr>
         <p:txBody>
@@ -1484,7 +1553,7 @@
         <p:spPr>
           <a:xfrm>
             <a:off x="6172200" y="1681163"/>
-            <a:ext cx="5183188" cy="823912"/>
+            <a:ext cx="5183717" cy="823912"/>
           </a:xfrm>
         </p:spPr>
         <p:txBody>
@@ -1550,7 +1619,7 @@
         <p:spPr>
           <a:xfrm>
             <a:off x="6172200" y="2505075"/>
-            <a:ext cx="5183188" cy="3684588"/>
+            <a:ext cx="5183717" cy="3684588"/>
           </a:xfrm>
         </p:spPr>
         <p:txBody>
@@ -1611,7 +1680,6 @@
         <p:spPr/>
         <p:txBody>
           <a:bodyPr/>
-          <a:lstStyle/>
           <a:p>
             <a:fld id="{63A1C593-65D0-4073-BCC9-577B9352EA97}" type="datetimeFigureOut">
               <a:rPr lang="en-US" smtClean="0"/>
@@ -1633,7 +1701,6 @@
         <p:spPr/>
         <p:txBody>
           <a:bodyPr/>
-          <a:lstStyle/>
           <a:p>
             <a:endParaRPr lang="en-US"/>
           </a:p>
@@ -1652,7 +1719,6 @@
         <p:spPr/>
         <p:txBody>
           <a:bodyPr/>
-          <a:lstStyle/>
           <a:p>
             <a:fld id="{9B618960-8005-486C-9A75-10CB2AAC16F9}" type="slidenum">
               <a:rPr lang="en-US" smtClean="0"/>
@@ -1666,6 +1732,7 @@
   <p:clrMapOvr>
     <a:masterClrMapping/>
   </p:clrMapOvr>
+  <p:hf sldNum="0" hdr="0" ftr="0" dt="0"/>
 </p:sldLayout>
 </file>
 
@@ -1722,7 +1789,6 @@
         <p:spPr/>
         <p:txBody>
           <a:bodyPr/>
-          <a:lstStyle/>
           <a:p>
             <a:fld id="{63A1C593-65D0-4073-BCC9-577B9352EA97}" type="datetimeFigureOut">
               <a:rPr lang="en-US" smtClean="0"/>
@@ -1744,7 +1810,6 @@
         <p:spPr/>
         <p:txBody>
           <a:bodyPr/>
-          <a:lstStyle/>
           <a:p>
             <a:endParaRPr lang="en-US"/>
           </a:p>
@@ -1763,7 +1828,6 @@
         <p:spPr/>
         <p:txBody>
           <a:bodyPr/>
-          <a:lstStyle/>
           <a:p>
             <a:fld id="{9B618960-8005-486C-9A75-10CB2AAC16F9}" type="slidenum">
               <a:rPr lang="en-US" smtClean="0"/>
@@ -1777,6 +1841,7 @@
   <p:clrMapOvr>
     <a:masterClrMapping/>
   </p:clrMapOvr>
+  <p:hf sldNum="0" hdr="0" ftr="0" dt="0"/>
 </p:sldLayout>
 </file>
 
@@ -1810,7 +1875,6 @@
         <p:spPr/>
         <p:txBody>
           <a:bodyPr/>
-          <a:lstStyle/>
           <a:p>
             <a:fld id="{63A1C593-65D0-4073-BCC9-577B9352EA97}" type="datetimeFigureOut">
               <a:rPr lang="en-US" smtClean="0"/>
@@ -1832,7 +1896,6 @@
         <p:spPr/>
         <p:txBody>
           <a:bodyPr/>
-          <a:lstStyle/>
           <a:p>
             <a:endParaRPr lang="en-US"/>
           </a:p>
@@ -1851,7 +1914,6 @@
         <p:spPr/>
         <p:txBody>
           <a:bodyPr/>
-          <a:lstStyle/>
           <a:p>
             <a:fld id="{9B618960-8005-486C-9A75-10CB2AAC16F9}" type="slidenum">
               <a:rPr lang="en-US" smtClean="0"/>
@@ -1865,6 +1927,7 @@
   <p:clrMapOvr>
     <a:masterClrMapping/>
   </p:clrMapOvr>
+  <p:hf sldNum="0" hdr="0" ftr="0" dt="0"/>
 </p:sldLayout>
 </file>
 
@@ -1897,8 +1960,8 @@
         </p:nvSpPr>
         <p:spPr>
           <a:xfrm>
-            <a:off x="839788" y="457200"/>
-            <a:ext cx="3932237" cy="1600200"/>
+            <a:off x="840317" y="457200"/>
+            <a:ext cx="3932767" cy="1600200"/>
           </a:xfrm>
         </p:spPr>
         <p:txBody>
@@ -1929,7 +1992,7 @@
         </p:nvSpPr>
         <p:spPr>
           <a:xfrm>
-            <a:off x="5183188" y="987425"/>
+            <a:off x="5183717" y="987425"/>
             <a:ext cx="6172200" cy="4873625"/>
           </a:xfrm>
         </p:spPr>
@@ -2018,8 +2081,8 @@
         </p:nvSpPr>
         <p:spPr>
           <a:xfrm>
-            <a:off x="839788" y="2057400"/>
-            <a:ext cx="3932237" cy="3811588"/>
+            <a:off x="840317" y="2057400"/>
+            <a:ext cx="3932767" cy="3811588"/>
           </a:xfrm>
         </p:spPr>
         <p:txBody>
@@ -2085,7 +2148,6 @@
         <p:spPr/>
         <p:txBody>
           <a:bodyPr/>
-          <a:lstStyle/>
           <a:p>
             <a:fld id="{63A1C593-65D0-4073-BCC9-577B9352EA97}" type="datetimeFigureOut">
               <a:rPr lang="en-US" smtClean="0"/>
@@ -2107,7 +2169,6 @@
         <p:spPr/>
         <p:txBody>
           <a:bodyPr/>
-          <a:lstStyle/>
           <a:p>
             <a:endParaRPr lang="en-US"/>
           </a:p>
@@ -2126,7 +2187,6 @@
         <p:spPr/>
         <p:txBody>
           <a:bodyPr/>
-          <a:lstStyle/>
           <a:p>
             <a:fld id="{9B618960-8005-486C-9A75-10CB2AAC16F9}" type="slidenum">
               <a:rPr lang="en-US" smtClean="0"/>
@@ -2140,6 +2200,7 @@
   <p:clrMapOvr>
     <a:masterClrMapping/>
   </p:clrMapOvr>
+  <p:hf sldNum="0" hdr="0" ftr="0" dt="0"/>
 </p:sldLayout>
 </file>
 
@@ -2172,8 +2233,8 @@
         </p:nvSpPr>
         <p:spPr>
           <a:xfrm>
-            <a:off x="839788" y="457200"/>
-            <a:ext cx="3932237" cy="1600200"/>
+            <a:off x="840317" y="457200"/>
+            <a:ext cx="3932767" cy="1600200"/>
           </a:xfrm>
         </p:spPr>
         <p:txBody>
@@ -2204,12 +2265,12 @@
         </p:nvSpPr>
         <p:spPr>
           <a:xfrm>
-            <a:off x="5183188" y="987425"/>
+            <a:off x="5183717" y="987425"/>
             <a:ext cx="6172200" cy="4873625"/>
           </a:xfrm>
         </p:spPr>
         <p:txBody>
-          <a:bodyPr/>
+          <a:bodyPr vert="horz" wrap="square" lIns="91440" tIns="45720" rIns="91440" bIns="45720" numCol="1" anchor="t" anchorCtr="0" compatLnSpc="1"/>
           <a:lstStyle>
             <a:lvl1pPr marL="0" indent="0">
               <a:buNone/>
@@ -2249,7 +2310,36 @@
             </a:lvl9pPr>
           </a:lstStyle>
           <a:p>
-            <a:endParaRPr lang="en-US"/>
+            <a:pPr marL="0" marR="0" lvl="0" indent="0" algn="l" defTabSz="914400" rtl="0" eaLnBrk="1" fontAlgn="base" latinLnBrk="0" hangingPunct="1">
+              <a:lnSpc>
+                <a:spcPct val="100000"/>
+              </a:lnSpc>
+              <a:spcBef>
+                <a:spcPct val="20000"/>
+              </a:spcBef>
+              <a:spcAft>
+                <a:spcPct val="0"/>
+              </a:spcAft>
+              <a:buClrTx/>
+              <a:buSzTx/>
+              <a:buFontTx/>
+              <a:buNone/>
+              <a:defRPr/>
+            </a:pPr>
+            <a:endParaRPr kumimoji="0" lang="en-US" sz="3200" b="0" i="0" u="none" strike="noStrike" kern="1200" cap="none" spc="0" normalizeH="0" baseline="0" noProof="0" smtClean="0">
+              <a:ln>
+                <a:noFill/>
+              </a:ln>
+              <a:solidFill>
+                <a:schemeClr val="tx1"/>
+              </a:solidFill>
+              <a:effectLst/>
+              <a:uLnTx/>
+              <a:uFillTx/>
+              <a:latin typeface="+mn-lt"/>
+              <a:ea typeface="+mn-ea"/>
+              <a:cs typeface="+mn-cs"/>
+            </a:endParaRPr>
           </a:p>
         </p:txBody>
       </p:sp>
@@ -2265,8 +2355,8 @@
         </p:nvSpPr>
         <p:spPr>
           <a:xfrm>
-            <a:off x="839788" y="2057400"/>
-            <a:ext cx="3932237" cy="3811588"/>
+            <a:off x="840317" y="2057400"/>
+            <a:ext cx="3932767" cy="3811588"/>
           </a:xfrm>
         </p:spPr>
         <p:txBody>
@@ -2332,7 +2422,6 @@
         <p:spPr/>
         <p:txBody>
           <a:bodyPr/>
-          <a:lstStyle/>
           <a:p>
             <a:fld id="{63A1C593-65D0-4073-BCC9-577B9352EA97}" type="datetimeFigureOut">
               <a:rPr lang="en-US" smtClean="0"/>
@@ -2354,7 +2443,6 @@
         <p:spPr/>
         <p:txBody>
           <a:bodyPr/>
-          <a:lstStyle/>
           <a:p>
             <a:endParaRPr lang="en-US"/>
           </a:p>
@@ -2373,7 +2461,6 @@
         <p:spPr/>
         <p:txBody>
           <a:bodyPr/>
-          <a:lstStyle/>
           <a:p>
             <a:fld id="{9B618960-8005-486C-9A75-10CB2AAC16F9}" type="slidenum">
               <a:rPr lang="en-US" smtClean="0"/>
@@ -2387,6 +2474,7 @@
   <p:clrMapOvr>
     <a:masterClrMapping/>
   </p:clrMapOvr>
+  <p:hf sldNum="0" hdr="0" ftr="0" dt="0"/>
 </p:sldLayout>
 </file>
 
@@ -2394,9 +2482,12 @@
 <p:sldMaster xmlns:a="http://schemas.openxmlformats.org/drawingml/2006/main" xmlns:r="http://schemas.openxmlformats.org/officeDocument/2006/relationships" xmlns:p="http://schemas.openxmlformats.org/presentationml/2006/main">
   <p:cSld>
     <p:bg>
-      <p:bgRef idx="1001">
-        <a:schemeClr val="bg1"/>
-      </p:bgRef>
+      <p:bgPr>
+        <a:solidFill>
+          <a:schemeClr val="bg1"/>
+        </a:solidFill>
+        <a:effectLst/>
+      </p:bgPr>
     </p:bg>
     <p:spTree>
       <p:nvGrpSpPr>
@@ -2404,220 +2495,325 @@
         <p:cNvGrpSpPr/>
         <p:nvPr/>
       </p:nvGrpSpPr>
-      <p:grpSpPr>
-        <a:xfrm>
-          <a:off x="0" y="0"/>
-          <a:ext cx="0" cy="0"/>
-          <a:chOff x="0" y="0"/>
-          <a:chExt cx="0" cy="0"/>
-        </a:xfrm>
-      </p:grpSpPr>
-      <p:sp>
-        <p:nvSpPr>
-          <p:cNvPr id="2" name="Title Placeholder 1"/>
-          <p:cNvSpPr>
-            <a:spLocks noGrp="1"/>
-          </p:cNvSpPr>
-          <p:nvPr>
-            <p:ph type="title"/>
-          </p:nvPr>
-        </p:nvSpPr>
+      <p:grpSpPr/>
+      <p:pic>
+        <p:nvPicPr>
+          <p:cNvPr id="1026" name="Picture 2"/>
+          <p:cNvPicPr>
+            <a:picLocks noChangeAspect="1"/>
+          </p:cNvPicPr>
+          <p:nvPr/>
+        </p:nvPicPr>
+        <p:blipFill>
+          <a:blip r:embed="rId12"/>
+          <a:stretch>
+            <a:fillRect/>
+          </a:stretch>
+        </p:blipFill>
         <p:spPr>
           <a:xfrm>
-            <a:off x="838200" y="365125"/>
-            <a:ext cx="10515600" cy="1325563"/>
+            <a:off x="0" y="0"/>
+            <a:ext cx="12192000" cy="6858000"/>
           </a:xfrm>
           <a:prstGeom prst="rect">
             <a:avLst/>
           </a:prstGeom>
+          <a:noFill/>
+          <a:ln w="9525">
+            <a:noFill/>
+          </a:ln>
         </p:spPr>
-        <p:txBody>
-          <a:bodyPr vert="horz" lIns="91440" tIns="45720" rIns="91440" bIns="45720" rtlCol="0" anchor="ctr">
-            <a:normAutofit/>
-          </a:bodyPr>
-          <a:lstStyle/>
-          <a:p>
-            <a:r>
-              <a:rPr lang="en-US" smtClean="0"/>
-              <a:t>Click to edit Master title style</a:t>
-            </a:r>
-            <a:endParaRPr lang="en-US"/>
-          </a:p>
-        </p:txBody>
-      </p:sp>
-      <p:sp>
-        <p:nvSpPr>
-          <p:cNvPr id="3" name="Text Placeholder 2"/>
-          <p:cNvSpPr>
-            <a:spLocks noGrp="1"/>
-          </p:cNvSpPr>
-          <p:nvPr>
-            <p:ph type="body" idx="1"/>
+      </p:pic>
+      <p:sp>
+        <p:nvSpPr>
+          <p:cNvPr id="1027" name="Rectangle 3"/>
+          <p:cNvSpPr>
+            <a:spLocks noGrp="1"/>
+          </p:cNvSpPr>
+          <p:nvPr>
+            <p:ph type="title"/>
           </p:nvPr>
         </p:nvSpPr>
         <p:spPr>
           <a:xfrm>
-            <a:off x="838200" y="1825625"/>
-            <a:ext cx="10515600" cy="4351338"/>
+            <a:off x="609600" y="190500"/>
+            <a:ext cx="10972800" cy="582613"/>
           </a:xfrm>
           <a:prstGeom prst="rect">
             <a:avLst/>
           </a:prstGeom>
+          <a:noFill/>
+          <a:ln w="9525">
+            <a:noFill/>
+          </a:ln>
         </p:spPr>
         <p:txBody>
-          <a:bodyPr vert="horz" lIns="91440" tIns="45720" rIns="91440" bIns="45720" rtlCol="0">
-            <a:normAutofit/>
-          </a:bodyPr>
-          <a:lstStyle/>
+          <a:bodyPr anchor="ctr" anchorCtr="0"/>
           <a:p>
             <a:pPr lvl="0"/>
             <a:r>
-              <a:rPr lang="en-US" smtClean="0"/>
-              <a:t>Click to edit Master text styles</a:t>
-            </a:r>
-            <a:endParaRPr lang="en-US" smtClean="0"/>
-          </a:p>
-          <a:p>
-            <a:pPr lvl="1"/>
-            <a:r>
-              <a:rPr lang="en-US" smtClean="0"/>
-              <a:t>Second level</a:t>
-            </a:r>
-            <a:endParaRPr lang="en-US" smtClean="0"/>
-          </a:p>
-          <a:p>
-            <a:pPr lvl="2"/>
-            <a:r>
-              <a:rPr lang="en-US" smtClean="0"/>
-              <a:t>Third level</a:t>
-            </a:r>
-            <a:endParaRPr lang="en-US" smtClean="0"/>
-          </a:p>
-          <a:p>
-            <a:pPr lvl="3"/>
-            <a:r>
-              <a:rPr lang="en-US" smtClean="0"/>
-              <a:t>Fourth level</a:t>
-            </a:r>
-            <a:endParaRPr lang="en-US" smtClean="0"/>
-          </a:p>
-          <a:p>
-            <a:pPr lvl="4"/>
-            <a:r>
-              <a:rPr lang="en-US" smtClean="0"/>
-              <a:t>Fifth level</a:t>
-            </a:r>
-            <a:endParaRPr lang="en-US"/>
-          </a:p>
-        </p:txBody>
-      </p:sp>
-      <p:sp>
-        <p:nvSpPr>
-          <p:cNvPr id="4" name="Date Placeholder 3"/>
-          <p:cNvSpPr>
-            <a:spLocks noGrp="1"/>
-          </p:cNvSpPr>
-          <p:nvPr>
-            <p:ph type="dt" sz="half" idx="2"/>
+              <a:rPr lang="en-US" altLang="zh-CN" dirty="0"/>
+              <a:t>Click to edit Master title style</a:t>
+            </a:r>
+            <a:endParaRPr lang="en-US" altLang="zh-CN" dirty="0"/>
+          </a:p>
+        </p:txBody>
+      </p:sp>
+      <p:sp>
+        <p:nvSpPr>
+          <p:cNvPr id="1028" name="Rectangle 4"/>
+          <p:cNvSpPr>
+            <a:spLocks noGrp="1"/>
+          </p:cNvSpPr>
+          <p:nvPr>
+            <p:ph type="body" idx="1"/>
           </p:nvPr>
         </p:nvSpPr>
         <p:spPr>
           <a:xfrm>
-            <a:off x="838200" y="6356350"/>
-            <a:ext cx="2743200" cy="365125"/>
+            <a:off x="609600" y="1174750"/>
+            <a:ext cx="10972800" cy="4953000"/>
           </a:xfrm>
           <a:prstGeom prst="rect">
             <a:avLst/>
           </a:prstGeom>
+          <a:noFill/>
+          <a:ln w="9525">
+            <a:noFill/>
+          </a:ln>
         </p:spPr>
         <p:txBody>
-          <a:bodyPr vert="horz" lIns="91440" tIns="45720" rIns="91440" bIns="45720" rtlCol="0" anchor="ctr"/>
-          <a:lstStyle>
-            <a:lvl1pPr algn="l">
-              <a:defRPr sz="1200">
-                <a:solidFill>
-                  <a:schemeClr val="tx1">
-                    <a:tint val="75000"/>
-                  </a:schemeClr>
-                </a:solidFill>
-              </a:defRPr>
-            </a:lvl1pPr>
-          </a:lstStyle>
-          <a:p>
-            <a:fld id="{63A1C593-65D0-4073-BCC9-577B9352EA97}" type="datetimeFigureOut">
-              <a:rPr lang="en-US" smtClean="0"/>
-            </a:fld>
-            <a:endParaRPr lang="en-US"/>
-          </a:p>
-        </p:txBody>
-      </p:sp>
-      <p:sp>
-        <p:nvSpPr>
-          <p:cNvPr id="5" name="Footer Placeholder 4"/>
-          <p:cNvSpPr>
-            <a:spLocks noGrp="1"/>
-          </p:cNvSpPr>
-          <p:nvPr>
-            <p:ph type="ftr" sz="quarter" idx="3"/>
-          </p:nvPr>
-        </p:nvSpPr>
-        <p:spPr>
+          <a:bodyPr/>
+          <a:p>
+            <a:pPr lvl="0"/>
+            <a:r>
+              <a:rPr lang="en-US" altLang="zh-CN" dirty="0"/>
+              <a:t>Click to edit Master text styles</a:t>
+            </a:r>
+            <a:endParaRPr lang="en-US" altLang="zh-CN" dirty="0"/>
+          </a:p>
+          <a:p>
+            <a:pPr lvl="1"/>
+            <a:r>
+              <a:rPr lang="en-US" altLang="zh-CN" dirty="0"/>
+              <a:t>Second level</a:t>
+            </a:r>
+            <a:endParaRPr lang="en-US" altLang="zh-CN" dirty="0"/>
+          </a:p>
+          <a:p>
+            <a:pPr lvl="2"/>
+            <a:r>
+              <a:rPr lang="en-US" altLang="zh-CN" dirty="0"/>
+              <a:t>Third level</a:t>
+            </a:r>
+            <a:endParaRPr lang="en-US" altLang="zh-CN" dirty="0"/>
+          </a:p>
+          <a:p>
+            <a:pPr lvl="3"/>
+            <a:r>
+              <a:rPr lang="en-US" altLang="zh-CN" dirty="0"/>
+              <a:t>Fourth level</a:t>
+            </a:r>
+            <a:endParaRPr lang="en-US" altLang="zh-CN" dirty="0"/>
+          </a:p>
+          <a:p>
+            <a:pPr lvl="4"/>
+            <a:r>
+              <a:rPr lang="en-US" altLang="zh-CN" dirty="0"/>
+              <a:t>Fifth level</a:t>
+            </a:r>
+            <a:endParaRPr lang="en-US" altLang="zh-CN" dirty="0"/>
+          </a:p>
+        </p:txBody>
+      </p:sp>
+      <p:sp>
+        <p:nvSpPr>
+          <p:cNvPr id="1029" name="Rectangle 5"/>
+          <p:cNvSpPr>
+            <a:spLocks noGrp="1" noChangeArrowheads="1"/>
+          </p:cNvSpPr>
+          <p:nvPr>
+            <p:ph type="dt" sz="half" idx="2"/>
+          </p:nvPr>
+        </p:nvSpPr>
+        <p:spPr bwMode="auto">
           <a:xfrm>
-            <a:off x="4038600" y="6356350"/>
-            <a:ext cx="4114800" cy="365125"/>
+            <a:off x="609600" y="6245225"/>
+            <a:ext cx="2844800" cy="476250"/>
           </a:xfrm>
           <a:prstGeom prst="rect">
             <a:avLst/>
           </a:prstGeom>
+          <a:noFill/>
+          <a:ln>
+            <a:noFill/>
+          </a:ln>
+          <a:effectLst/>
+          <a:extLst>
+            <a:ext uri="{909E8E84-426E-40DD-AFC4-6F175D3DCCD1}">
+              <a14:hiddenFill xmlns:a14="http://schemas.microsoft.com/office/drawing/2010/main">
+                <a:solidFill>
+                  <a:schemeClr val="accent1"/>
+                </a:solidFill>
+              </a14:hiddenFill>
+            </a:ext>
+            <a:ext uri="{91240B29-F687-4F45-9708-019B960494DF}">
+              <a14:hiddenLine xmlns:a14="http://schemas.microsoft.com/office/drawing/2010/main" w="9525">
+                <a:solidFill>
+                  <a:srgbClr val="000000"/>
+                </a:solidFill>
+                <a:miter lim="800000"/>
+                <a:headEnd/>
+                <a:tailEnd/>
+              </a14:hiddenLine>
+            </a:ext>
+            <a:ext uri="{AF507438-7753-43E0-B8FC-AC1667EBCBE1}">
+              <a14:hiddenEffects xmlns:a14="http://schemas.microsoft.com/office/drawing/2010/main">
+                <a:effectLst>
+                  <a:outerShdw dist="35921" dir="2700000" algn="ctr" rotWithShape="0">
+                    <a:schemeClr val="bg2"/>
+                  </a:outerShdw>
+                </a:effectLst>
+              </a14:hiddenEffects>
+            </a:ext>
+          </a:extLst>
         </p:spPr>
         <p:txBody>
-          <a:bodyPr vert="horz" lIns="91440" tIns="45720" rIns="91440" bIns="45720" rtlCol="0" anchor="ctr"/>
+          <a:bodyPr vert="horz" wrap="square" lIns="91440" tIns="45720" rIns="91440" bIns="45720" numCol="1" anchor="t" anchorCtr="0" compatLnSpc="1"/>
           <a:lstStyle>
-            <a:lvl1pPr algn="ctr">
-              <a:defRPr sz="1200">
-                <a:solidFill>
-                  <a:schemeClr val="tx1">
-                    <a:tint val="75000"/>
-                  </a:schemeClr>
-                </a:solidFill>
-              </a:defRPr>
+            <a:lvl1pPr>
+              <a:defRPr sz="1400"/>
             </a:lvl1pPr>
           </a:lstStyle>
           <a:p>
+            <a:fld id="{63A1C593-65D0-4073-BCC9-577B9352EA97}" type="datetimeFigureOut">
+              <a:rPr lang="en-US" smtClean="0"/>
+            </a:fld>
             <a:endParaRPr lang="en-US"/>
           </a:p>
         </p:txBody>
       </p:sp>
       <p:sp>
         <p:nvSpPr>
-          <p:cNvPr id="6" name="Slide Number Placeholder 5"/>
-          <p:cNvSpPr>
-            <a:spLocks noGrp="1"/>
-          </p:cNvSpPr>
-          <p:nvPr>
-            <p:ph type="sldNum" sz="quarter" idx="4"/>
-          </p:nvPr>
-        </p:nvSpPr>
-        <p:spPr>
+          <p:cNvPr id="1030" name="Rectangle 6"/>
+          <p:cNvSpPr>
+            <a:spLocks noGrp="1" noChangeArrowheads="1"/>
+          </p:cNvSpPr>
+          <p:nvPr>
+            <p:ph type="ftr" sz="quarter" idx="3"/>
+          </p:nvPr>
+        </p:nvSpPr>
+        <p:spPr bwMode="auto">
           <a:xfrm>
-            <a:off x="8610600" y="6356350"/>
-            <a:ext cx="2743200" cy="365125"/>
+            <a:off x="4165600" y="6245225"/>
+            <a:ext cx="3860800" cy="476250"/>
           </a:xfrm>
           <a:prstGeom prst="rect">
             <a:avLst/>
           </a:prstGeom>
+          <a:noFill/>
+          <a:ln>
+            <a:noFill/>
+          </a:ln>
+          <a:effectLst/>
+          <a:extLst>
+            <a:ext uri="{909E8E84-426E-40DD-AFC4-6F175D3DCCD1}">
+              <a14:hiddenFill xmlns:a14="http://schemas.microsoft.com/office/drawing/2010/main">
+                <a:solidFill>
+                  <a:schemeClr val="accent1"/>
+                </a:solidFill>
+              </a14:hiddenFill>
+            </a:ext>
+            <a:ext uri="{91240B29-F687-4F45-9708-019B960494DF}">
+              <a14:hiddenLine xmlns:a14="http://schemas.microsoft.com/office/drawing/2010/main" w="9525">
+                <a:solidFill>
+                  <a:srgbClr val="000000"/>
+                </a:solidFill>
+                <a:miter lim="800000"/>
+                <a:headEnd/>
+                <a:tailEnd/>
+              </a14:hiddenLine>
+            </a:ext>
+            <a:ext uri="{AF507438-7753-43E0-B8FC-AC1667EBCBE1}">
+              <a14:hiddenEffects xmlns:a14="http://schemas.microsoft.com/office/drawing/2010/main">
+                <a:effectLst>
+                  <a:outerShdw dist="35921" dir="2700000" algn="ctr" rotWithShape="0">
+                    <a:schemeClr val="bg2"/>
+                  </a:outerShdw>
+                </a:effectLst>
+              </a14:hiddenEffects>
+            </a:ext>
+          </a:extLst>
         </p:spPr>
         <p:txBody>
-          <a:bodyPr vert="horz" lIns="91440" tIns="45720" rIns="91440" bIns="45720" rtlCol="0" anchor="ctr"/>
+          <a:bodyPr vert="horz" wrap="square" lIns="91440" tIns="45720" rIns="91440" bIns="45720" numCol="1" anchor="t" anchorCtr="0" compatLnSpc="1"/>
+          <a:lstStyle>
+            <a:lvl1pPr algn="ctr">
+              <a:defRPr sz="1400"/>
+            </a:lvl1pPr>
+          </a:lstStyle>
+          <a:p>
+            <a:endParaRPr lang="en-US"/>
+          </a:p>
+        </p:txBody>
+      </p:sp>
+      <p:sp>
+        <p:nvSpPr>
+          <p:cNvPr id="1031" name="Rectangle 7"/>
+          <p:cNvSpPr>
+            <a:spLocks noGrp="1" noChangeArrowheads="1"/>
+          </p:cNvSpPr>
+          <p:nvPr>
+            <p:ph type="sldNum" sz="quarter" idx="4"/>
+          </p:nvPr>
+        </p:nvSpPr>
+        <p:spPr bwMode="auto">
+          <a:xfrm>
+            <a:off x="8737600" y="6245225"/>
+            <a:ext cx="2844800" cy="476250"/>
+          </a:xfrm>
+          <a:prstGeom prst="rect">
+            <a:avLst/>
+          </a:prstGeom>
+          <a:noFill/>
+          <a:ln>
+            <a:noFill/>
+          </a:ln>
+          <a:effectLst/>
+          <a:extLst>
+            <a:ext uri="{909E8E84-426E-40DD-AFC4-6F175D3DCCD1}">
+              <a14:hiddenFill xmlns:a14="http://schemas.microsoft.com/office/drawing/2010/main">
+                <a:solidFill>
+                  <a:schemeClr val="accent1"/>
+                </a:solidFill>
+              </a14:hiddenFill>
+            </a:ext>
+            <a:ext uri="{91240B29-F687-4F45-9708-019B960494DF}">
+              <a14:hiddenLine xmlns:a14="http://schemas.microsoft.com/office/drawing/2010/main" w="9525">
+                <a:solidFill>
+                  <a:srgbClr val="000000"/>
+                </a:solidFill>
+                <a:miter lim="800000"/>
+                <a:headEnd/>
+                <a:tailEnd/>
+              </a14:hiddenLine>
+            </a:ext>
+            <a:ext uri="{AF507438-7753-43E0-B8FC-AC1667EBCBE1}">
+              <a14:hiddenEffects xmlns:a14="http://schemas.microsoft.com/office/drawing/2010/main">
+                <a:effectLst>
+                  <a:outerShdw dist="35921" dir="2700000" algn="ctr" rotWithShape="0">
+                    <a:schemeClr val="bg2"/>
+                  </a:outerShdw>
+                </a:effectLst>
+              </a14:hiddenEffects>
+            </a:ext>
+          </a:extLst>
+        </p:spPr>
+        <p:txBody>
+          <a:bodyPr vert="horz" wrap="square" lIns="91440" tIns="45720" rIns="91440" bIns="45720" numCol="1" anchor="t" anchorCtr="0" compatLnSpc="1"/>
           <a:lstStyle>
             <a:lvl1pPr algn="r">
-              <a:defRPr sz="1200">
-                <a:solidFill>
-                  <a:schemeClr val="tx1">
-                    <a:tint val="75000"/>
-                  </a:schemeClr>
-                </a:solidFill>
-              </a:defRPr>
+              <a:defRPr sz="1400"/>
             </a:lvl1pPr>
           </a:lstStyle>
           <a:p>
@@ -2644,17 +2840,17 @@
     <p:sldLayoutId id="2147483658" r:id="rId10"/>
     <p:sldLayoutId id="2147483659" r:id="rId11"/>
   </p:sldLayoutIdLst>
+  <p:hf sldNum="0" hdr="0" ftr="0" dt="0"/>
   <p:txStyles>
     <p:titleStyle>
-      <a:lvl1pPr algn="l" defTabSz="914400" rtl="0" eaLnBrk="1" latinLnBrk="0" hangingPunct="1">
-        <a:lnSpc>
-          <a:spcPct val="90000"/>
-        </a:lnSpc>
+      <a:lvl1pPr algn="l" rtl="0" fontAlgn="base">
         <a:spcBef>
           <a:spcPct val="0"/>
         </a:spcBef>
-        <a:buNone/>
-        <a:defRPr sz="4400" kern="1200">
+        <a:spcAft>
+          <a:spcPct val="0"/>
+        </a:spcAft>
+        <a:defRPr sz="3600" kern="1200">
           <a:solidFill>
             <a:schemeClr val="tx1"/>
           </a:solidFill>
@@ -2663,17 +2859,153 @@
           <a:cs typeface="+mj-cs"/>
         </a:defRPr>
       </a:lvl1pPr>
+      <a:lvl2pPr algn="l" rtl="0" fontAlgn="base">
+        <a:spcBef>
+          <a:spcPct val="0"/>
+        </a:spcBef>
+        <a:spcAft>
+          <a:spcPct val="0"/>
+        </a:spcAft>
+        <a:defRPr sz="3600">
+          <a:solidFill>
+            <a:schemeClr val="tx1"/>
+          </a:solidFill>
+          <a:latin typeface="Arial" panose="020B0604020202020204" pitchFamily="34" charset="0"/>
+          <a:ea typeface="SimSun" panose="02010600030101010101" pitchFamily="2" charset="-122"/>
+        </a:defRPr>
+      </a:lvl2pPr>
+      <a:lvl3pPr algn="l" rtl="0" fontAlgn="base">
+        <a:spcBef>
+          <a:spcPct val="0"/>
+        </a:spcBef>
+        <a:spcAft>
+          <a:spcPct val="0"/>
+        </a:spcAft>
+        <a:defRPr sz="3600">
+          <a:solidFill>
+            <a:schemeClr val="tx1"/>
+          </a:solidFill>
+          <a:latin typeface="Arial" panose="020B0604020202020204" pitchFamily="34" charset="0"/>
+          <a:ea typeface="SimSun" panose="02010600030101010101" pitchFamily="2" charset="-122"/>
+        </a:defRPr>
+      </a:lvl3pPr>
+      <a:lvl4pPr algn="l" rtl="0" fontAlgn="base">
+        <a:spcBef>
+          <a:spcPct val="0"/>
+        </a:spcBef>
+        <a:spcAft>
+          <a:spcPct val="0"/>
+        </a:spcAft>
+        <a:defRPr sz="3600">
+          <a:solidFill>
+            <a:schemeClr val="tx1"/>
+          </a:solidFill>
+          <a:latin typeface="Arial" panose="020B0604020202020204" pitchFamily="34" charset="0"/>
+          <a:ea typeface="SimSun" panose="02010600030101010101" pitchFamily="2" charset="-122"/>
+        </a:defRPr>
+      </a:lvl4pPr>
+      <a:lvl5pPr algn="l" rtl="0" fontAlgn="base">
+        <a:spcBef>
+          <a:spcPct val="0"/>
+        </a:spcBef>
+        <a:spcAft>
+          <a:spcPct val="0"/>
+        </a:spcAft>
+        <a:defRPr sz="3600">
+          <a:solidFill>
+            <a:schemeClr val="tx1"/>
+          </a:solidFill>
+          <a:latin typeface="Arial" panose="020B0604020202020204" pitchFamily="34" charset="0"/>
+          <a:ea typeface="SimSun" panose="02010600030101010101" pitchFamily="2" charset="-122"/>
+        </a:defRPr>
+      </a:lvl5pPr>
+      <a:lvl6pPr marL="457200" algn="l" rtl="0" fontAlgn="base">
+        <a:spcBef>
+          <a:spcPct val="0"/>
+        </a:spcBef>
+        <a:spcAft>
+          <a:spcPct val="0"/>
+        </a:spcAft>
+        <a:defRPr sz="3600">
+          <a:solidFill>
+            <a:schemeClr val="tx1"/>
+          </a:solidFill>
+          <a:latin typeface="Arial" panose="020B0604020202020204" pitchFamily="34" charset="0"/>
+          <a:ea typeface="SimSun" panose="02010600030101010101" pitchFamily="2" charset="-122"/>
+        </a:defRPr>
+      </a:lvl6pPr>
+      <a:lvl7pPr marL="914400" algn="l" rtl="0" fontAlgn="base">
+        <a:spcBef>
+          <a:spcPct val="0"/>
+        </a:spcBef>
+        <a:spcAft>
+          <a:spcPct val="0"/>
+        </a:spcAft>
+        <a:defRPr sz="3600">
+          <a:solidFill>
+            <a:schemeClr val="tx1"/>
+          </a:solidFill>
+          <a:latin typeface="Arial" panose="020B0604020202020204" pitchFamily="34" charset="0"/>
+          <a:ea typeface="SimSun" panose="02010600030101010101" pitchFamily="2" charset="-122"/>
+        </a:defRPr>
+      </a:lvl7pPr>
+      <a:lvl8pPr marL="1371600" algn="l" rtl="0" fontAlgn="base">
+        <a:spcBef>
+          <a:spcPct val="0"/>
+        </a:spcBef>
+        <a:spcAft>
+          <a:spcPct val="0"/>
+        </a:spcAft>
+        <a:defRPr sz="3600">
+          <a:solidFill>
+            <a:schemeClr val="tx1"/>
+          </a:solidFill>
+          <a:latin typeface="Arial" panose="020B0604020202020204" pitchFamily="34" charset="0"/>
+          <a:ea typeface="SimSun" panose="02010600030101010101" pitchFamily="2" charset="-122"/>
+        </a:defRPr>
+      </a:lvl8pPr>
+      <a:lvl9pPr marL="1828800" algn="l" rtl="0" fontAlgn="base">
+        <a:spcBef>
+          <a:spcPct val="0"/>
+        </a:spcBef>
+        <a:spcAft>
+          <a:spcPct val="0"/>
+        </a:spcAft>
+        <a:defRPr sz="3600">
+          <a:solidFill>
+            <a:schemeClr val="tx1"/>
+          </a:solidFill>
+          <a:latin typeface="Arial" panose="020B0604020202020204" pitchFamily="34" charset="0"/>
+          <a:ea typeface="SimSun" panose="02010600030101010101" pitchFamily="2" charset="-122"/>
+        </a:defRPr>
+      </a:lvl9pPr>
     </p:titleStyle>
     <p:bodyStyle>
-      <a:lvl1pPr marL="228600" indent="-228600" algn="l" defTabSz="914400" rtl="0" eaLnBrk="1" latinLnBrk="0" hangingPunct="1">
-        <a:lnSpc>
-          <a:spcPct val="90000"/>
-        </a:lnSpc>
+      <a:lvl1pPr marL="342900" indent="-342900" algn="l" rtl="0" fontAlgn="base">
         <a:spcBef>
-          <a:spcPts val="1000"/>
+          <a:spcPct val="20000"/>
         </a:spcBef>
-        <a:buFont typeface="Arial" panose="020B0604020202020204" pitchFamily="34" charset="0"/>
+        <a:spcAft>
+          <a:spcPct val="0"/>
+        </a:spcAft>
         <a:buChar char="•"/>
+        <a:defRPr sz="3200" kern="1200">
+          <a:solidFill>
+            <a:schemeClr val="tx1"/>
+          </a:solidFill>
+          <a:latin typeface="+mn-lt"/>
+          <a:ea typeface="+mn-ea"/>
+          <a:cs typeface="+mn-cs"/>
+        </a:defRPr>
+      </a:lvl1pPr>
+      <a:lvl2pPr marL="742950" indent="-285750" algn="l" rtl="0" fontAlgn="base">
+        <a:spcBef>
+          <a:spcPct val="20000"/>
+        </a:spcBef>
+        <a:spcAft>
+          <a:spcPct val="0"/>
+        </a:spcAft>
+        <a:buChar char="–"/>
         <a:defRPr sz="2800" kern="1200">
           <a:solidFill>
             <a:schemeClr val="tx1"/>
@@ -2682,15 +3014,14 @@
           <a:ea typeface="+mn-ea"/>
           <a:cs typeface="+mn-cs"/>
         </a:defRPr>
-      </a:lvl1pPr>
-      <a:lvl2pPr marL="685800" indent="-228600" algn="l" defTabSz="914400" rtl="0" eaLnBrk="1" latinLnBrk="0" hangingPunct="1">
-        <a:lnSpc>
-          <a:spcPct val="90000"/>
-        </a:lnSpc>
+      </a:lvl2pPr>
+      <a:lvl3pPr marL="1143000" indent="-228600" algn="l" rtl="0" fontAlgn="base">
         <a:spcBef>
-          <a:spcPts val="500"/>
+          <a:spcPct val="20000"/>
         </a:spcBef>
-        <a:buFont typeface="Arial" panose="020B0604020202020204" pitchFamily="34" charset="0"/>
+        <a:spcAft>
+          <a:spcPct val="0"/>
+        </a:spcAft>
         <a:buChar char="•"/>
         <a:defRPr sz="2400" kern="1200">
           <a:solidFill>
@@ -2700,16 +3031,15 @@
           <a:ea typeface="+mn-ea"/>
           <a:cs typeface="+mn-cs"/>
         </a:defRPr>
-      </a:lvl2pPr>
-      <a:lvl3pPr marL="1143000" indent="-228600" algn="l" defTabSz="914400" rtl="0" eaLnBrk="1" latinLnBrk="0" hangingPunct="1">
-        <a:lnSpc>
-          <a:spcPct val="90000"/>
-        </a:lnSpc>
+      </a:lvl3pPr>
+      <a:lvl4pPr marL="1600200" indent="-228600" algn="l" rtl="0" fontAlgn="base">
         <a:spcBef>
-          <a:spcPts val="500"/>
+          <a:spcPct val="20000"/>
         </a:spcBef>
-        <a:buFont typeface="Arial" panose="020B0604020202020204" pitchFamily="34" charset="0"/>
-        <a:buChar char="•"/>
+        <a:spcAft>
+          <a:spcPct val="0"/>
+        </a:spcAft>
+        <a:buChar char="–"/>
         <a:defRPr sz="2000" kern="1200">
           <a:solidFill>
             <a:schemeClr val="tx1"/>
@@ -2718,35 +3048,16 @@
           <a:ea typeface="+mn-ea"/>
           <a:cs typeface="+mn-cs"/>
         </a:defRPr>
-      </a:lvl3pPr>
-      <a:lvl4pPr marL="1600200" indent="-228600" algn="l" defTabSz="914400" rtl="0" eaLnBrk="1" latinLnBrk="0" hangingPunct="1">
-        <a:lnSpc>
-          <a:spcPct val="90000"/>
-        </a:lnSpc>
+      </a:lvl4pPr>
+      <a:lvl5pPr marL="2057400" indent="-228600" algn="l" rtl="0" fontAlgn="base">
         <a:spcBef>
-          <a:spcPts val="500"/>
+          <a:spcPct val="20000"/>
         </a:spcBef>
-        <a:buFont typeface="Arial" panose="020B0604020202020204" pitchFamily="34" charset="0"/>
-        <a:buChar char="•"/>
-        <a:defRPr sz="1800" kern="1200">
-          <a:solidFill>
-            <a:schemeClr val="tx1"/>
-          </a:solidFill>
-          <a:latin typeface="+mn-lt"/>
-          <a:ea typeface="+mn-ea"/>
-          <a:cs typeface="+mn-cs"/>
-        </a:defRPr>
-      </a:lvl4pPr>
-      <a:lvl5pPr marL="2057400" indent="-228600" algn="l" defTabSz="914400" rtl="0" eaLnBrk="1" latinLnBrk="0" hangingPunct="1">
-        <a:lnSpc>
-          <a:spcPct val="90000"/>
-        </a:lnSpc>
-        <a:spcBef>
-          <a:spcPts val="500"/>
-        </a:spcBef>
-        <a:buFont typeface="Arial" panose="020B0604020202020204" pitchFamily="34" charset="0"/>
-        <a:buChar char="•"/>
-        <a:defRPr sz="1800" kern="1200">
+        <a:spcAft>
+          <a:spcPct val="0"/>
+        </a:spcAft>
+        <a:buChar char="»"/>
+        <a:defRPr sz="2000" kern="1200">
           <a:solidFill>
             <a:schemeClr val="tx1"/>
           </a:solidFill>
@@ -3165,26 +3476,48 @@
           <a:p>
             <a:r>
               <a:rPr lang="sr-Latn-RS" altLang="en-US"/>
-              <a:t>Prva d</a:t>
+              <a:t>Obe d</a:t>
             </a:r>
             <a:r>
               <a:rPr lang="en-US" altLang="en-GB"/>
-              <a:t>atoteka route_events sad</a:t>
+              <a:t>atotek</a:t>
+            </a:r>
+            <a:r>
+              <a:rPr lang="sr-Latn-RS" altLang="en-US"/>
+              <a:t>e,</a:t>
+            </a:r>
+            <a:r>
+              <a:rPr lang="en-US" altLang="en-GB"/>
+              <a:t> route_events</a:t>
+            </a:r>
+            <a:r>
+              <a:rPr lang="sr-Latn-RS" altLang="en-US"/>
+              <a:t> i </a:t>
+            </a:r>
+            <a:r>
+              <a:rPr lang="en-US" altLang="en-GB"/>
+              <a:t> </a:t>
+            </a:r>
+            <a:r>
+              <a:rPr lang="sr-Latn-RS" altLang="en-GB">
+                <a:sym typeface="+mn-ea"/>
+              </a:rPr>
+              <a:t>shipments_master, </a:t>
+            </a:r>
+            <a:r>
+              <a:rPr lang="en-US" altLang="en-GB"/>
+              <a:t>sad</a:t>
             </a:r>
             <a:r>
               <a:rPr lang="sr-Latn-RS" altLang="en-GB"/>
-              <a:t>rži 5 000 000 zapisa.</a:t>
+              <a:t>rže 5 000 000 zapisa.</a:t>
             </a:r>
             <a:endParaRPr lang="sr-Latn-RS" altLang="en-GB"/>
           </a:p>
           <a:p>
-            <a:r>
-              <a:rPr lang="sr-Latn-RS" altLang="en-GB"/>
-              <a:t>Druga datoteka shipments_master sadrži 1550 zapisa.</a:t>
-            </a:r>
-            <a:endParaRPr lang="sr-Latn-RS" altLang="en-GB"/>
-          </a:p>
-          <a:p>
+            <a:pPr marL="0" indent="0">
+              <a:buNone/>
+            </a:pPr>
             <a:endParaRPr lang="sr-Latn-RS" altLang="en-GB"/>
           </a:p>
           <a:p>
@@ -3253,7 +3586,7 @@
         </p:nvGraphicFramePr>
         <p:xfrm>
           <a:off x="838200" y="1945640"/>
-          <a:ext cx="8564880" cy="4434840"/>
+          <a:ext cx="8564880" cy="4160520"/>
         </p:xfrm>
         <a:graphic>
           <a:graphicData uri="http://schemas.openxmlformats.org/drawingml/2006/table">
@@ -3265,7 +3598,7 @@
                 <a:gridCol w="2807970"/>
                 <a:gridCol w="5756910"/>
               </a:tblGrid>
-              <a:tr h="492760">
+              <a:tr h="462280">
                 <a:tc>
                   <a:txBody>
                     <a:bodyPr/>
@@ -3307,7 +3640,7 @@
                   <a:tcPr/>
                 </a:tc>
               </a:tr>
-              <a:tr h="492760">
+              <a:tr h="462280">
                 <a:tc>
                   <a:txBody>
                     <a:bodyPr/>
@@ -3341,7 +3674,7 @@
                   <a:tcPr/>
                 </a:tc>
               </a:tr>
-              <a:tr h="492760">
+              <a:tr h="462280">
                 <a:tc>
                   <a:txBody>
                     <a:bodyPr/>
@@ -3375,7 +3708,7 @@
                   <a:tcPr/>
                 </a:tc>
               </a:tr>
-              <a:tr h="492760">
+              <a:tr h="462280">
                 <a:tc>
                   <a:txBody>
                     <a:bodyPr/>
@@ -3417,7 +3750,7 @@
                   <a:tcPr/>
                 </a:tc>
               </a:tr>
-              <a:tr h="492760">
+              <a:tr h="462280">
                 <a:tc>
                   <a:txBody>
                     <a:bodyPr/>
@@ -3483,7 +3816,7 @@
                   <a:tcPr/>
                 </a:tc>
               </a:tr>
-              <a:tr h="492760">
+              <a:tr h="462280">
                 <a:tc>
                   <a:txBody>
                     <a:bodyPr/>
@@ -3517,7 +3850,7 @@
                   <a:tcPr/>
                 </a:tc>
               </a:tr>
-              <a:tr h="492760">
+              <a:tr h="462280">
                 <a:tc>
                   <a:txBody>
                     <a:bodyPr/>
@@ -3551,7 +3884,7 @@
                   <a:tcPr/>
                 </a:tc>
               </a:tr>
-              <a:tr h="492760">
+              <a:tr h="462280">
                 <a:tc>
                   <a:txBody>
                     <a:bodyPr/>
@@ -3585,7 +3918,7 @@
                   <a:tcPr/>
                 </a:tc>
               </a:tr>
-              <a:tr h="492760">
+              <a:tr h="462280">
                 <a:tc>
                   <a:txBody>
                     <a:bodyPr/>
@@ -3688,7 +4021,7 @@
         </p:nvGraphicFramePr>
         <p:xfrm>
           <a:off x="838200" y="1946910"/>
-          <a:ext cx="7908290" cy="4120515"/>
+          <a:ext cx="7908290" cy="3825240"/>
         </p:xfrm>
         <a:graphic>
           <a:graphicData uri="http://schemas.openxmlformats.org/drawingml/2006/table">
@@ -3700,7 +4033,7 @@
                 <a:gridCol w="2879090"/>
                 <a:gridCol w="5029200"/>
               </a:tblGrid>
-              <a:tr h="497205">
+              <a:tr h="461645">
                 <a:tc>
                   <a:txBody>
                     <a:bodyPr/>
@@ -3734,7 +4067,7 @@
                   <a:tcPr/>
                 </a:tc>
               </a:tr>
-              <a:tr h="497205">
+              <a:tr h="461645">
                 <a:tc>
                   <a:txBody>
                     <a:bodyPr/>
@@ -3768,7 +4101,7 @@
                   <a:tcPr/>
                 </a:tc>
               </a:tr>
-              <a:tr h="496570">
+              <a:tr h="461010">
                 <a:tc>
                   <a:txBody>
                     <a:bodyPr/>
@@ -3810,7 +4143,7 @@
                   <a:tcPr/>
                 </a:tc>
               </a:tr>
-              <a:tr h="497205">
+              <a:tr h="461645">
                 <a:tc>
                   <a:txBody>
                     <a:bodyPr/>
@@ -3852,7 +4185,7 @@
                   <a:tcPr/>
                 </a:tc>
               </a:tr>
-              <a:tr h="497840">
+              <a:tr h="461645">
                 <a:tc>
                   <a:txBody>
                     <a:bodyPr/>
@@ -3894,7 +4227,7 @@
                   <a:tcPr/>
                 </a:tc>
               </a:tr>
-              <a:tr h="497205">
+              <a:tr h="461645">
                 <a:tc>
                   <a:txBody>
                     <a:bodyPr/>
@@ -3928,7 +4261,7 @@
                   <a:tcPr/>
                 </a:tc>
               </a:tr>
-              <a:tr h="640080">
+              <a:tr h="594360">
                 <a:tc>
                   <a:txBody>
                     <a:bodyPr/>
@@ -3962,7 +4295,7 @@
                   <a:tcPr/>
                 </a:tc>
               </a:tr>
-              <a:tr h="497205">
+              <a:tr h="461645">
                 <a:tc>
                   <a:txBody>
                     <a:bodyPr/>
@@ -4943,6 +5276,114 @@
           <a:bodyPr/>
           <a:p>
             <a:r>
+              <a:rPr lang="sr-Latn-RS" altLang="en-GB"/>
+              <a:t>Primer prostiranja</a:t>
+            </a:r>
+            <a:endParaRPr lang="sr-Latn-RS" altLang="en-GB"/>
+          </a:p>
+        </p:txBody>
+      </p:sp>
+      <p:sp>
+        <p:nvSpPr>
+          <p:cNvPr id="3" name="Content Placeholder 2"/>
+          <p:cNvSpPr>
+            <a:spLocks noGrp="1"/>
+          </p:cNvSpPr>
+          <p:nvPr>
+            <p:ph idx="1"/>
+          </p:nvPr>
+        </p:nvSpPr>
+        <p:spPr/>
+        <p:txBody>
+          <a:bodyPr/>
+          <a:p>
+            <a:r>
+              <a:rPr lang="sr-Latn-RS" altLang="en-GB"/>
+              <a:t>shipment_id</a:t>
+            </a:r>
+            <a:endParaRPr lang="sr-Latn-RS" altLang="en-GB"/>
+          </a:p>
+          <a:p>
+            <a:r>
+              <a:rPr lang="sr-Latn-RS" altLang="en-GB"/>
+              <a:t>isporuka (0-*)                                               (1-*) događaj na ruti </a:t>
+            </a:r>
+            <a:endParaRPr lang="sr-Latn-RS" altLang="en-GB"/>
+          </a:p>
+          <a:p>
+            <a:endParaRPr lang="sr-Latn-RS" altLang="en-GB"/>
+          </a:p>
+        </p:txBody>
+      </p:sp>
+      <p:cxnSp>
+        <p:nvCxnSpPr>
+          <p:cNvPr id="4" name="Straight Connector 3"/>
+          <p:cNvCxnSpPr/>
+          <p:nvPr/>
+        </p:nvCxnSpPr>
+        <p:spPr>
+          <a:xfrm>
+            <a:off x="3444875" y="2583815"/>
+            <a:ext cx="3209925" cy="7620"/>
+          </a:xfrm>
+          <a:prstGeom prst="line">
+            <a:avLst/>
+          </a:prstGeom>
+          <a:ln w="31750" cap="rnd">
+            <a:solidFill>
+              <a:schemeClr val="accent1"/>
+            </a:solidFill>
+            <a:round/>
+          </a:ln>
+        </p:spPr>
+        <p:style>
+          <a:lnRef idx="0">
+            <a:srgbClr val="FFFFFF"/>
+          </a:lnRef>
+          <a:fillRef idx="0">
+            <a:srgbClr val="FFFFFF"/>
+          </a:fillRef>
+          <a:effectRef idx="0">
+            <a:srgbClr val="FFFFFF"/>
+          </a:effectRef>
+          <a:fontRef idx="minor">
+            <a:schemeClr val="tx1"/>
+          </a:fontRef>
+        </p:style>
+      </p:cxnSp>
+    </p:spTree>
+  </p:cSld>
+  <p:clrMapOvr>
+    <a:masterClrMapping/>
+  </p:clrMapOvr>
+</p:sld>
+</file>
+
+<file path=ppt/slides/slide9.xml><?xml version="1.0" encoding="utf-8"?>
+<p:sld xmlns:a="http://schemas.openxmlformats.org/drawingml/2006/main" xmlns:r="http://schemas.openxmlformats.org/officeDocument/2006/relationships" xmlns:p="http://schemas.openxmlformats.org/presentationml/2006/main">
+  <p:cSld>
+    <p:spTree>
+      <p:nvGrpSpPr>
+        <p:cNvPr id="1" name=""/>
+        <p:cNvGrpSpPr/>
+        <p:nvPr/>
+      </p:nvGrpSpPr>
+      <p:grpSpPr/>
+      <p:sp>
+        <p:nvSpPr>
+          <p:cNvPr id="2" name="Title 1"/>
+          <p:cNvSpPr>
+            <a:spLocks noGrp="1"/>
+          </p:cNvSpPr>
+          <p:nvPr>
+            <p:ph type="title"/>
+          </p:nvPr>
+        </p:nvSpPr>
+        <p:spPr/>
+        <p:txBody>
+          <a:bodyPr/>
+          <a:p>
+            <a:r>
               <a:rPr lang="en-US" altLang="en-GB"/>
               <a:t>Predlog logi</a:t>
             </a:r>
@@ -4982,15 +5423,15 @@
 
 <file path=ppt/tags/tag1.xml><?xml version="1.0" encoding="utf-8"?>
 <p:tagLst xmlns:p="http://schemas.openxmlformats.org/presentationml/2006/main">
-  <p:tag name="TABLE_ENDDRAG_ORIGIN_RECT" val="674*349"/>
-  <p:tag name="TABLE_ENDDRAG_RECT" val="66*114*674*349"/>
+  <p:tag name="TABLE_ENDDRAG_ORIGIN_RECT" val="674*327"/>
+  <p:tag name="TABLE_ENDDRAG_RECT" val="66*153*674*327"/>
 </p:tagLst>
 </file>
 
 <file path=ppt/tags/tag2.xml><?xml version="1.0" encoding="utf-8"?>
 <p:tagLst xmlns:p="http://schemas.openxmlformats.org/presentationml/2006/main">
-  <p:tag name="TABLE_ENDDRAG_ORIGIN_RECT" val="622*322"/>
-  <p:tag name="TABLE_ENDDRAG_RECT" val="66*153*622*322"/>
+  <p:tag name="TABLE_ENDDRAG_ORIGIN_RECT" val="622*301"/>
+  <p:tag name="TABLE_ENDDRAG_RECT" val="66*153*622*301"/>
 </p:tagLst>
 </file>
 
@@ -5009,116 +5450,56 @@
 </file>
 
 <file path=ppt/theme/theme1.xml><?xml version="1.0" encoding="utf-8"?>
-<a:theme xmlns:a="http://schemas.openxmlformats.org/drawingml/2006/main" name="Office Theme">
+<a:theme xmlns:a="http://schemas.openxmlformats.org/drawingml/2006/main" name="Orange Waves">
   <a:themeElements>
-    <a:clrScheme name="Office">
+    <a:clrScheme name="Orange Waves 13">
       <a:dk1>
-        <a:sysClr val="windowText" lastClr="000000"/>
+        <a:srgbClr val="000000"/>
       </a:dk1>
       <a:lt1>
-        <a:sysClr val="window" lastClr="FFFFFF"/>
+        <a:srgbClr val="FFFFFF"/>
       </a:lt1>
       <a:dk2>
-        <a:srgbClr val="44546A"/>
+        <a:srgbClr val="000000"/>
       </a:dk2>
       <a:lt2>
-        <a:srgbClr val="E7E6E6"/>
+        <a:srgbClr val="969696"/>
       </a:lt2>
       <a:accent1>
-        <a:srgbClr val="5B9BD5"/>
+        <a:srgbClr val="C73109"/>
       </a:accent1>
       <a:accent2>
-        <a:srgbClr val="ED7D31"/>
+        <a:srgbClr val="FF5050"/>
       </a:accent2>
       <a:accent3>
-        <a:srgbClr val="A5A5A5"/>
+        <a:srgbClr val="FFFFFF"/>
       </a:accent3>
       <a:accent4>
-        <a:srgbClr val="FFC000"/>
+        <a:srgbClr val="000000"/>
       </a:accent4>
       <a:accent5>
-        <a:srgbClr val="4472C4"/>
+        <a:srgbClr val="E0ADAA"/>
       </a:accent5>
       <a:accent6>
-        <a:srgbClr val="70AD47"/>
+        <a:srgbClr val="E74848"/>
       </a:accent6>
       <a:hlink>
-        <a:srgbClr val="0563C1"/>
+        <a:srgbClr val="4D4D4D"/>
       </a:hlink>
       <a:folHlink>
-        <a:srgbClr val="954F72"/>
+        <a:srgbClr val="777777"/>
       </a:folHlink>
     </a:clrScheme>
-    <a:fontScheme name="Office">
+    <a:fontScheme name="Orange Waves">
       <a:majorFont>
-        <a:latin typeface="Calibri Light"/>
-        <a:ea typeface=""/>
+        <a:latin typeface="Arial"/>
+        <a:ea typeface="SimSun"/>
         <a:cs typeface=""/>
-        <a:font script="Jpan" typeface="ＭＳ Ｐゴシック"/>
-        <a:font script="Hang" typeface="맑은 고딕"/>
-        <a:font script="Hans" typeface="宋体"/>
-        <a:font script="Hant" typeface="新細明體"/>
-        <a:font script="Arab" typeface="Times New Roman"/>
-        <a:font script="Hebr" typeface="Times New Roman"/>
-        <a:font script="Thai" typeface="Angsana New"/>
-        <a:font script="Ethi" typeface="Nyala"/>
-        <a:font script="Beng" typeface="Vrinda"/>
-        <a:font script="Gujr" typeface="Shruti"/>
-        <a:font script="Khmr" typeface="MoolBoran"/>
-        <a:font script="Knda" typeface="Tunga"/>
-        <a:font script="Guru" typeface="Raavi"/>
-        <a:font script="Cans" typeface="Euphemia"/>
-        <a:font script="Cher" typeface="Plantagenet Cherokee"/>
-        <a:font script="Yiii" typeface="Microsoft Yi Baiti"/>
-        <a:font script="Tibt" typeface="Microsoft Himalaya"/>
-        <a:font script="Thaa" typeface="MV Boli"/>
-        <a:font script="Deva" typeface="Mangal"/>
-        <a:font script="Telu" typeface="Gautami"/>
-        <a:font script="Taml" typeface="Latha"/>
-        <a:font script="Syrc" typeface="Estrangelo Edessa"/>
-        <a:font script="Orya" typeface="Kalinga"/>
-        <a:font script="Mlym" typeface="Kartika"/>
-        <a:font script="Laoo" typeface="DokChampa"/>
-        <a:font script="Sinh" typeface="Iskoola Pota"/>
-        <a:font script="Mong" typeface="Mongolian Baiti"/>
-        <a:font script="Viet" typeface="Times New Roman"/>
-        <a:font script="Uigh" typeface="Microsoft Uighur"/>
-        <a:font script="Geor" typeface="Sylfaen"/>
       </a:majorFont>
       <a:minorFont>
-        <a:latin typeface="Calibri"/>
-        <a:ea typeface=""/>
+        <a:latin typeface="Arial"/>
+        <a:ea typeface="SimSun"/>
         <a:cs typeface=""/>
-        <a:font script="Jpan" typeface="ＭＳ Ｐゴシック"/>
-        <a:font script="Hang" typeface="맑은 고딕"/>
-        <a:font script="Hans" typeface="宋体"/>
-        <a:font script="Hant" typeface="新細明體"/>
-        <a:font script="Arab" typeface="Arial"/>
-        <a:font script="Hebr" typeface="Arial"/>
-        <a:font script="Thai" typeface="Cordia New"/>
-        <a:font script="Ethi" typeface="Nyala"/>
-        <a:font script="Beng" typeface="Vrinda"/>
-        <a:font script="Gujr" typeface="Shruti"/>
-        <a:font script="Khmr" typeface="DaunPenh"/>
-        <a:font script="Knda" typeface="Tunga"/>
-        <a:font script="Guru" typeface="Raavi"/>
-        <a:font script="Cans" typeface="Euphemia"/>
-        <a:font script="Cher" typeface="Plantagenet Cherokee"/>
-        <a:font script="Yiii" typeface="Microsoft Yi Baiti"/>
-        <a:font script="Tibt" typeface="Microsoft Himalaya"/>
-        <a:font script="Thaa" typeface="MV Boli"/>
-        <a:font script="Deva" typeface="Mangal"/>
-        <a:font script="Telu" typeface="Gautami"/>
-        <a:font script="Taml" typeface="Latha"/>
-        <a:font script="Syrc" typeface="Estrangelo Edessa"/>
-        <a:font script="Orya" typeface="Kalinga"/>
-        <a:font script="Mlym" typeface="Kartika"/>
-        <a:font script="Laoo" typeface="DokChampa"/>
-        <a:font script="Sinh" typeface="Iskoola Pota"/>
-        <a:font script="Mong" typeface="Mongolian Baiti"/>
-        <a:font script="Viet" typeface="Arial"/>
-        <a:font script="Uigh" typeface="Microsoft Uighur"/>
-        <a:font script="Geor" typeface="Sylfaen"/>
       </a:minorFont>
     </a:fontScheme>
     <a:fmtScheme name="Office">
@@ -5259,6 +5640,673 @@
       </a:bgFillStyleLst>
     </a:fmtScheme>
   </a:themeElements>
+  <a:objectDefaults>
+    <a:spDef>
+      <a:spPr bwMode="auto">
+        <a:xfrm>
+          <a:off x="0" y="0"/>
+          <a:ext cx="1" cy="1"/>
+        </a:xfrm>
+        <a:custGeom>
+          <a:avLst/>
+          <a:gdLst/>
+          <a:ahLst/>
+          <a:cxnLst/>
+          <a:rect l="0" t="0" r="0" b="0"/>
+          <a:pathLst/>
+        </a:custGeom>
+        <a:gradFill rotWithShape="0">
+          <a:gsLst>
+            <a:gs pos="0">
+              <a:schemeClr val="accent1"/>
+            </a:gs>
+            <a:gs pos="100000">
+              <a:schemeClr val="accent2"/>
+            </a:gs>
+          </a:gsLst>
+          <a:lin ang="5400000" scaled="1"/>
+        </a:gradFill>
+        <a:ln w="9525" cap="flat" cmpd="sng" algn="ctr">
+          <a:solidFill>
+            <a:schemeClr val="accent1"/>
+          </a:solidFill>
+          <a:prstDash val="solid"/>
+          <a:round/>
+          <a:headEnd type="none" w="med" len="med"/>
+          <a:tailEnd type="none" w="med" len="med"/>
+        </a:ln>
+      </a:spPr>
+      <a:bodyPr vert="horz" wrap="none" lIns="91440" tIns="45720" rIns="91440" bIns="45720" numCol="1" anchor="ctr" anchorCtr="0" compatLnSpc="1"/>
+      <a:lstStyle>
+        <a:defPPr marL="0" marR="0" indent="0" algn="l" defTabSz="914400" rtl="0" eaLnBrk="1" fontAlgn="base" latinLnBrk="0" hangingPunct="1">
+          <a:lnSpc>
+            <a:spcPct val="100000"/>
+          </a:lnSpc>
+          <a:spcBef>
+            <a:spcPct val="0"/>
+          </a:spcBef>
+          <a:spcAft>
+            <a:spcPct val="0"/>
+          </a:spcAft>
+          <a:buClrTx/>
+          <a:buSzTx/>
+          <a:buFontTx/>
+          <a:buNone/>
+          <a:defRPr kumimoji="0" lang="zh-CN" altLang="en-US" sz="1800" b="0" i="0" u="none" strike="noStrike" cap="none" normalizeH="0" baseline="0" smtClean="0">
+            <a:ln>
+              <a:noFill/>
+            </a:ln>
+            <a:solidFill>
+              <a:schemeClr val="tx1"/>
+            </a:solidFill>
+            <a:effectLst/>
+            <a:latin typeface="Arial" panose="020B0604020202020204" pitchFamily="34" charset="0"/>
+            <a:ea typeface="SimSun" panose="02010600030101010101" pitchFamily="2" charset="-122"/>
+          </a:defRPr>
+        </a:defPPr>
+      </a:lstStyle>
+    </a:spDef>
+    <a:lnDef>
+      <a:spPr bwMode="auto">
+        <a:xfrm>
+          <a:off x="0" y="0"/>
+          <a:ext cx="1" cy="1"/>
+        </a:xfrm>
+        <a:custGeom>
+          <a:avLst/>
+          <a:gdLst/>
+          <a:ahLst/>
+          <a:cxnLst/>
+          <a:rect l="0" t="0" r="0" b="0"/>
+          <a:pathLst/>
+        </a:custGeom>
+        <a:gradFill rotWithShape="0">
+          <a:gsLst>
+            <a:gs pos="0">
+              <a:schemeClr val="accent1"/>
+            </a:gs>
+            <a:gs pos="100000">
+              <a:schemeClr val="accent2"/>
+            </a:gs>
+          </a:gsLst>
+          <a:lin ang="5400000" scaled="1"/>
+        </a:gradFill>
+        <a:ln w="9525" cap="flat" cmpd="sng" algn="ctr">
+          <a:solidFill>
+            <a:schemeClr val="accent1"/>
+          </a:solidFill>
+          <a:prstDash val="solid"/>
+          <a:round/>
+          <a:headEnd type="none" w="med" len="med"/>
+          <a:tailEnd type="none" w="med" len="med"/>
+        </a:ln>
+      </a:spPr>
+      <a:bodyPr vert="horz" wrap="none" lIns="91440" tIns="45720" rIns="91440" bIns="45720" numCol="1" anchor="ctr" anchorCtr="0" compatLnSpc="1"/>
+      <a:lstStyle>
+        <a:defPPr marL="0" marR="0" indent="0" algn="l" defTabSz="914400" rtl="0" eaLnBrk="1" fontAlgn="base" latinLnBrk="0" hangingPunct="1">
+          <a:lnSpc>
+            <a:spcPct val="100000"/>
+          </a:lnSpc>
+          <a:spcBef>
+            <a:spcPct val="0"/>
+          </a:spcBef>
+          <a:spcAft>
+            <a:spcPct val="0"/>
+          </a:spcAft>
+          <a:buClrTx/>
+          <a:buSzTx/>
+          <a:buFontTx/>
+          <a:buNone/>
+          <a:defRPr kumimoji="0" lang="zh-CN" altLang="en-US" sz="1800" b="0" i="0" u="none" strike="noStrike" cap="none" normalizeH="0" baseline="0" smtClean="0">
+            <a:ln>
+              <a:noFill/>
+            </a:ln>
+            <a:solidFill>
+              <a:schemeClr val="tx1"/>
+            </a:solidFill>
+            <a:effectLst/>
+            <a:latin typeface="Arial" panose="020B0604020202020204" pitchFamily="34" charset="0"/>
+            <a:ea typeface="SimSun" panose="02010600030101010101" pitchFamily="2" charset="-122"/>
+          </a:defRPr>
+        </a:defPPr>
+      </a:lstStyle>
+    </a:lnDef>
+  </a:objectDefaults>
+  <a:extraClrSchemeLst>
+    <a:extraClrScheme>
+      <a:clrScheme name="Orange Waves 1">
+        <a:dk1>
+          <a:srgbClr val="000000"/>
+        </a:dk1>
+        <a:lt1>
+          <a:srgbClr val="FFFFFF"/>
+        </a:lt1>
+        <a:dk2>
+          <a:srgbClr val="000000"/>
+        </a:dk2>
+        <a:lt2>
+          <a:srgbClr val="808080"/>
+        </a:lt2>
+        <a:accent1>
+          <a:srgbClr val="BBE0E3"/>
+        </a:accent1>
+        <a:accent2>
+          <a:srgbClr val="333399"/>
+        </a:accent2>
+        <a:accent3>
+          <a:srgbClr val="FFFFFF"/>
+        </a:accent3>
+        <a:accent4>
+          <a:srgbClr val="000000"/>
+        </a:accent4>
+        <a:accent5>
+          <a:srgbClr val="DAEDEF"/>
+        </a:accent5>
+        <a:accent6>
+          <a:srgbClr val="2D2D8A"/>
+        </a:accent6>
+        <a:hlink>
+          <a:srgbClr val="009999"/>
+        </a:hlink>
+        <a:folHlink>
+          <a:srgbClr val="99CC00"/>
+        </a:folHlink>
+      </a:clrScheme>
+      <a:clrMap bg1="lt1" tx1="dk1" bg2="lt2" tx2="dk2" accent1="accent1" accent2="accent2" accent3="accent3" accent4="accent4" accent5="accent5" accent6="accent6" hlink="hlink" folHlink="folHlink"/>
+    </a:extraClrScheme>
+    <a:extraClrScheme>
+      <a:clrScheme name="Orange Waves 2">
+        <a:dk1>
+          <a:srgbClr val="000000"/>
+        </a:dk1>
+        <a:lt1>
+          <a:srgbClr val="FFFFFF"/>
+        </a:lt1>
+        <a:dk2>
+          <a:srgbClr val="000000"/>
+        </a:dk2>
+        <a:lt2>
+          <a:srgbClr val="969696"/>
+        </a:lt2>
+        <a:accent1>
+          <a:srgbClr val="FBDF53"/>
+        </a:accent1>
+        <a:accent2>
+          <a:srgbClr val="FF9966"/>
+        </a:accent2>
+        <a:accent3>
+          <a:srgbClr val="FFFFFF"/>
+        </a:accent3>
+        <a:accent4>
+          <a:srgbClr val="000000"/>
+        </a:accent4>
+        <a:accent5>
+          <a:srgbClr val="FDECB3"/>
+        </a:accent5>
+        <a:accent6>
+          <a:srgbClr val="E78A5C"/>
+        </a:accent6>
+        <a:hlink>
+          <a:srgbClr val="CC3300"/>
+        </a:hlink>
+        <a:folHlink>
+          <a:srgbClr val="996600"/>
+        </a:folHlink>
+      </a:clrScheme>
+      <a:clrMap bg1="lt1" tx1="dk1" bg2="lt2" tx2="dk2" accent1="accent1" accent2="accent2" accent3="accent3" accent4="accent4" accent5="accent5" accent6="accent6" hlink="hlink" folHlink="folHlink"/>
+    </a:extraClrScheme>
+    <a:extraClrScheme>
+      <a:clrScheme name="Orange Waves 3">
+        <a:dk1>
+          <a:srgbClr val="000000"/>
+        </a:dk1>
+        <a:lt1>
+          <a:srgbClr val="FFFFFF"/>
+        </a:lt1>
+        <a:dk2>
+          <a:srgbClr val="000000"/>
+        </a:dk2>
+        <a:lt2>
+          <a:srgbClr val="808080"/>
+        </a:lt2>
+        <a:accent1>
+          <a:srgbClr val="99CCFF"/>
+        </a:accent1>
+        <a:accent2>
+          <a:srgbClr val="CCCCFF"/>
+        </a:accent2>
+        <a:accent3>
+          <a:srgbClr val="FFFFFF"/>
+        </a:accent3>
+        <a:accent4>
+          <a:srgbClr val="000000"/>
+        </a:accent4>
+        <a:accent5>
+          <a:srgbClr val="CAE2FF"/>
+        </a:accent5>
+        <a:accent6>
+          <a:srgbClr val="B9B9E7"/>
+        </a:accent6>
+        <a:hlink>
+          <a:srgbClr val="3333CC"/>
+        </a:hlink>
+        <a:folHlink>
+          <a:srgbClr val="AF67FF"/>
+        </a:folHlink>
+      </a:clrScheme>
+      <a:clrMap bg1="lt1" tx1="dk1" bg2="lt2" tx2="dk2" accent1="accent1" accent2="accent2" accent3="accent3" accent4="accent4" accent5="accent5" accent6="accent6" hlink="hlink" folHlink="folHlink"/>
+    </a:extraClrScheme>
+    <a:extraClrScheme>
+      <a:clrScheme name="Orange Waves 4">
+        <a:dk1>
+          <a:srgbClr val="000000"/>
+        </a:dk1>
+        <a:lt1>
+          <a:srgbClr val="DEF6F1"/>
+        </a:lt1>
+        <a:dk2>
+          <a:srgbClr val="000000"/>
+        </a:dk2>
+        <a:lt2>
+          <a:srgbClr val="969696"/>
+        </a:lt2>
+        <a:accent1>
+          <a:srgbClr val="FFFFFF"/>
+        </a:accent1>
+        <a:accent2>
+          <a:srgbClr val="8DC6FF"/>
+        </a:accent2>
+        <a:accent3>
+          <a:srgbClr val="ECFAF7"/>
+        </a:accent3>
+        <a:accent4>
+          <a:srgbClr val="000000"/>
+        </a:accent4>
+        <a:accent5>
+          <a:srgbClr val="FFFFFF"/>
+        </a:accent5>
+        <a:accent6>
+          <a:srgbClr val="7FB3E7"/>
+        </a:accent6>
+        <a:hlink>
+          <a:srgbClr val="0066CC"/>
+        </a:hlink>
+        <a:folHlink>
+          <a:srgbClr val="00A800"/>
+        </a:folHlink>
+      </a:clrScheme>
+      <a:clrMap bg1="lt1" tx1="dk1" bg2="lt2" tx2="dk2" accent1="accent1" accent2="accent2" accent3="accent3" accent4="accent4" accent5="accent5" accent6="accent6" hlink="hlink" folHlink="folHlink"/>
+    </a:extraClrScheme>
+    <a:extraClrScheme>
+      <a:clrScheme name="Orange Waves 5">
+        <a:dk1>
+          <a:srgbClr val="000000"/>
+        </a:dk1>
+        <a:lt1>
+          <a:srgbClr val="FFFFD9"/>
+        </a:lt1>
+        <a:dk2>
+          <a:srgbClr val="000000"/>
+        </a:dk2>
+        <a:lt2>
+          <a:srgbClr val="777777"/>
+        </a:lt2>
+        <a:accent1>
+          <a:srgbClr val="FFFFF7"/>
+        </a:accent1>
+        <a:accent2>
+          <a:srgbClr val="33CCCC"/>
+        </a:accent2>
+        <a:accent3>
+          <a:srgbClr val="FFFFE9"/>
+        </a:accent3>
+        <a:accent4>
+          <a:srgbClr val="000000"/>
+        </a:accent4>
+        <a:accent5>
+          <a:srgbClr val="FFFFFA"/>
+        </a:accent5>
+        <a:accent6>
+          <a:srgbClr val="2DB9B9"/>
+        </a:accent6>
+        <a:hlink>
+          <a:srgbClr val="FF5050"/>
+        </a:hlink>
+        <a:folHlink>
+          <a:srgbClr val="FF9900"/>
+        </a:folHlink>
+      </a:clrScheme>
+      <a:clrMap bg1="lt1" tx1="dk1" bg2="lt2" tx2="dk2" accent1="accent1" accent2="accent2" accent3="accent3" accent4="accent4" accent5="accent5" accent6="accent6" hlink="hlink" folHlink="folHlink"/>
+    </a:extraClrScheme>
+    <a:extraClrScheme>
+      <a:clrScheme name="Orange Waves 6">
+        <a:dk1>
+          <a:srgbClr val="005A58"/>
+        </a:dk1>
+        <a:lt1>
+          <a:srgbClr val="FFFFFF"/>
+        </a:lt1>
+        <a:dk2>
+          <a:srgbClr val="008080"/>
+        </a:dk2>
+        <a:lt2>
+          <a:srgbClr val="FFFF99"/>
+        </a:lt2>
+        <a:accent1>
+          <a:srgbClr val="006462"/>
+        </a:accent1>
+        <a:accent2>
+          <a:srgbClr val="6D6FC7"/>
+        </a:accent2>
+        <a:accent3>
+          <a:srgbClr val="AAC0C0"/>
+        </a:accent3>
+        <a:accent4>
+          <a:srgbClr val="DADADA"/>
+        </a:accent4>
+        <a:accent5>
+          <a:srgbClr val="AAB8B7"/>
+        </a:accent5>
+        <a:accent6>
+          <a:srgbClr val="6264B4"/>
+        </a:accent6>
+        <a:hlink>
+          <a:srgbClr val="00FFFF"/>
+        </a:hlink>
+        <a:folHlink>
+          <a:srgbClr val="00FF00"/>
+        </a:folHlink>
+      </a:clrScheme>
+      <a:clrMap bg1="dk2" tx1="lt1" bg2="dk1" tx2="lt2" accent1="accent1" accent2="accent2" accent3="accent3" accent4="accent4" accent5="accent5" accent6="accent6" hlink="hlink" folHlink="folHlink"/>
+    </a:extraClrScheme>
+    <a:extraClrScheme>
+      <a:clrScheme name="Orange Waves 7">
+        <a:dk1>
+          <a:srgbClr val="5C1F00"/>
+        </a:dk1>
+        <a:lt1>
+          <a:srgbClr val="FFFFFF"/>
+        </a:lt1>
+        <a:dk2>
+          <a:srgbClr val="800000"/>
+        </a:dk2>
+        <a:lt2>
+          <a:srgbClr val="DFD293"/>
+        </a:lt2>
+        <a:accent1>
+          <a:srgbClr val="CC3300"/>
+        </a:accent1>
+        <a:accent2>
+          <a:srgbClr val="BE7960"/>
+        </a:accent2>
+        <a:accent3>
+          <a:srgbClr val="C0AAAA"/>
+        </a:accent3>
+        <a:accent4>
+          <a:srgbClr val="DADADA"/>
+        </a:accent4>
+        <a:accent5>
+          <a:srgbClr val="E2ADAA"/>
+        </a:accent5>
+        <a:accent6>
+          <a:srgbClr val="AC6D56"/>
+        </a:accent6>
+        <a:hlink>
+          <a:srgbClr val="FFFF99"/>
+        </a:hlink>
+        <a:folHlink>
+          <a:srgbClr val="D3A219"/>
+        </a:folHlink>
+      </a:clrScheme>
+      <a:clrMap bg1="dk2" tx1="lt1" bg2="dk1" tx2="lt2" accent1="accent1" accent2="accent2" accent3="accent3" accent4="accent4" accent5="accent5" accent6="accent6" hlink="hlink" folHlink="folHlink"/>
+    </a:extraClrScheme>
+    <a:extraClrScheme>
+      <a:clrScheme name="Orange Waves 8">
+        <a:dk1>
+          <a:srgbClr val="003366"/>
+        </a:dk1>
+        <a:lt1>
+          <a:srgbClr val="FFFFFF"/>
+        </a:lt1>
+        <a:dk2>
+          <a:srgbClr val="000099"/>
+        </a:dk2>
+        <a:lt2>
+          <a:srgbClr val="CCFFFF"/>
+        </a:lt2>
+        <a:accent1>
+          <a:srgbClr val="3366CC"/>
+        </a:accent1>
+        <a:accent2>
+          <a:srgbClr val="00B000"/>
+        </a:accent2>
+        <a:accent3>
+          <a:srgbClr val="AAAACA"/>
+        </a:accent3>
+        <a:accent4>
+          <a:srgbClr val="DADADA"/>
+        </a:accent4>
+        <a:accent5>
+          <a:srgbClr val="ADB8E2"/>
+        </a:accent5>
+        <a:accent6>
+          <a:srgbClr val="009F00"/>
+        </a:accent6>
+        <a:hlink>
+          <a:srgbClr val="66CCFF"/>
+        </a:hlink>
+        <a:folHlink>
+          <a:srgbClr val="FFE701"/>
+        </a:folHlink>
+      </a:clrScheme>
+      <a:clrMap bg1="dk2" tx1="lt1" bg2="dk1" tx2="lt2" accent1="accent1" accent2="accent2" accent3="accent3" accent4="accent4" accent5="accent5" accent6="accent6" hlink="hlink" folHlink="folHlink"/>
+    </a:extraClrScheme>
+    <a:extraClrScheme>
+      <a:clrScheme name="Orange Waves 9">
+        <a:dk1>
+          <a:srgbClr val="336699"/>
+        </a:dk1>
+        <a:lt1>
+          <a:srgbClr val="FFFFFF"/>
+        </a:lt1>
+        <a:dk2>
+          <a:srgbClr val="000000"/>
+        </a:dk2>
+        <a:lt2>
+          <a:srgbClr val="E3EBF1"/>
+        </a:lt2>
+        <a:accent1>
+          <a:srgbClr val="003399"/>
+        </a:accent1>
+        <a:accent2>
+          <a:srgbClr val="468A4B"/>
+        </a:accent2>
+        <a:accent3>
+          <a:srgbClr val="AAAAAA"/>
+        </a:accent3>
+        <a:accent4>
+          <a:srgbClr val="DADADA"/>
+        </a:accent4>
+        <a:accent5>
+          <a:srgbClr val="AAADCA"/>
+        </a:accent5>
+        <a:accent6>
+          <a:srgbClr val="3F7D43"/>
+        </a:accent6>
+        <a:hlink>
+          <a:srgbClr val="66CCFF"/>
+        </a:hlink>
+        <a:folHlink>
+          <a:srgbClr val="F0E500"/>
+        </a:folHlink>
+      </a:clrScheme>
+      <a:clrMap bg1="dk2" tx1="lt1" bg2="dk1" tx2="lt2" accent1="accent1" accent2="accent2" accent3="accent3" accent4="accent4" accent5="accent5" accent6="accent6" hlink="hlink" folHlink="folHlink"/>
+    </a:extraClrScheme>
+    <a:extraClrScheme>
+      <a:clrScheme name="Orange Waves 10">
+        <a:dk1>
+          <a:srgbClr val="777777"/>
+        </a:dk1>
+        <a:lt1>
+          <a:srgbClr val="FFFFFF"/>
+        </a:lt1>
+        <a:dk2>
+          <a:srgbClr val="686B5D"/>
+        </a:dk2>
+        <a:lt2>
+          <a:srgbClr val="D1D1CB"/>
+        </a:lt2>
+        <a:accent1>
+          <a:srgbClr val="909082"/>
+        </a:accent1>
+        <a:accent2>
+          <a:srgbClr val="809EA8"/>
+        </a:accent2>
+        <a:accent3>
+          <a:srgbClr val="B9BAB6"/>
+        </a:accent3>
+        <a:accent4>
+          <a:srgbClr val="DADADA"/>
+        </a:accent4>
+        <a:accent5>
+          <a:srgbClr val="C6C6C1"/>
+        </a:accent5>
+        <a:accent6>
+          <a:srgbClr val="738F98"/>
+        </a:accent6>
+        <a:hlink>
+          <a:srgbClr val="FFCC66"/>
+        </a:hlink>
+        <a:folHlink>
+          <a:srgbClr val="E9DCB9"/>
+        </a:folHlink>
+      </a:clrScheme>
+      <a:clrMap bg1="dk2" tx1="lt1" bg2="dk1" tx2="lt2" accent1="accent1" accent2="accent2" accent3="accent3" accent4="accent4" accent5="accent5" accent6="accent6" hlink="hlink" folHlink="folHlink"/>
+    </a:extraClrScheme>
+    <a:extraClrScheme>
+      <a:clrScheme name="Orange Waves 11">
+        <a:dk1>
+          <a:srgbClr val="3E3E5C"/>
+        </a:dk1>
+        <a:lt1>
+          <a:srgbClr val="FFFFFF"/>
+        </a:lt1>
+        <a:dk2>
+          <a:srgbClr val="666699"/>
+        </a:dk2>
+        <a:lt2>
+          <a:srgbClr val="FFFFFF"/>
+        </a:lt2>
+        <a:accent1>
+          <a:srgbClr val="60597B"/>
+        </a:accent1>
+        <a:accent2>
+          <a:srgbClr val="6666FF"/>
+        </a:accent2>
+        <a:accent3>
+          <a:srgbClr val="B8B8CA"/>
+        </a:accent3>
+        <a:accent4>
+          <a:srgbClr val="DADADA"/>
+        </a:accent4>
+        <a:accent5>
+          <a:srgbClr val="B6B5BF"/>
+        </a:accent5>
+        <a:accent6>
+          <a:srgbClr val="5C5CE7"/>
+        </a:accent6>
+        <a:hlink>
+          <a:srgbClr val="99CCFF"/>
+        </a:hlink>
+        <a:folHlink>
+          <a:srgbClr val="FFFF99"/>
+        </a:folHlink>
+      </a:clrScheme>
+      <a:clrMap bg1="dk2" tx1="lt1" bg2="dk1" tx2="lt2" accent1="accent1" accent2="accent2" accent3="accent3" accent4="accent4" accent5="accent5" accent6="accent6" hlink="hlink" folHlink="folHlink"/>
+    </a:extraClrScheme>
+    <a:extraClrScheme>
+      <a:clrScheme name="Orange Waves 12">
+        <a:dk1>
+          <a:srgbClr val="2D2015"/>
+        </a:dk1>
+        <a:lt1>
+          <a:srgbClr val="FFFFFF"/>
+        </a:lt1>
+        <a:dk2>
+          <a:srgbClr val="523E26"/>
+        </a:dk2>
+        <a:lt2>
+          <a:srgbClr val="DFC08D"/>
+        </a:lt2>
+        <a:accent1>
+          <a:srgbClr val="8C7B70"/>
+        </a:accent1>
+        <a:accent2>
+          <a:srgbClr val="8F5F2F"/>
+        </a:accent2>
+        <a:accent3>
+          <a:srgbClr val="B3AFAC"/>
+        </a:accent3>
+        <a:accent4>
+          <a:srgbClr val="DADADA"/>
+        </a:accent4>
+        <a:accent5>
+          <a:srgbClr val="C5BFBB"/>
+        </a:accent5>
+        <a:accent6>
+          <a:srgbClr val="81552A"/>
+        </a:accent6>
+        <a:hlink>
+          <a:srgbClr val="CCB400"/>
+        </a:hlink>
+        <a:folHlink>
+          <a:srgbClr val="8C9EA0"/>
+        </a:folHlink>
+      </a:clrScheme>
+      <a:clrMap bg1="dk2" tx1="lt1" bg2="dk1" tx2="lt2" accent1="accent1" accent2="accent2" accent3="accent3" accent4="accent4" accent5="accent5" accent6="accent6" hlink="hlink" folHlink="folHlink"/>
+    </a:extraClrScheme>
+    <a:extraClrScheme>
+      <a:clrScheme name="Orange Waves 13">
+        <a:dk1>
+          <a:srgbClr val="000000"/>
+        </a:dk1>
+        <a:lt1>
+          <a:srgbClr val="FFFFFF"/>
+        </a:lt1>
+        <a:dk2>
+          <a:srgbClr val="000000"/>
+        </a:dk2>
+        <a:lt2>
+          <a:srgbClr val="969696"/>
+        </a:lt2>
+        <a:accent1>
+          <a:srgbClr val="C73109"/>
+        </a:accent1>
+        <a:accent2>
+          <a:srgbClr val="FF5050"/>
+        </a:accent2>
+        <a:accent3>
+          <a:srgbClr val="FFFFFF"/>
+        </a:accent3>
+        <a:accent4>
+          <a:srgbClr val="000000"/>
+        </a:accent4>
+        <a:accent5>
+          <a:srgbClr val="E0ADAA"/>
+        </a:accent5>
+        <a:accent6>
+          <a:srgbClr val="E74848"/>
+        </a:accent6>
+        <a:hlink>
+          <a:srgbClr val="4D4D4D"/>
+        </a:hlink>
+        <a:folHlink>
+          <a:srgbClr val="777777"/>
+        </a:folHlink>
+      </a:clrScheme>
+      <a:clrMap bg1="lt1" tx1="dk1" bg2="lt2" tx2="dk2" accent1="accent1" accent2="accent2" accent3="accent3" accent4="accent4" accent5="accent5" accent6="accent6" hlink="hlink" folHlink="folHlink"/>
+    </a:extraClrScheme>
+  </a:extraClrSchemeLst>
   <a:extLst>
     <a:ext uri="{05A4C25C-085E-4340-85A3-A5531E510DB2}">
       <thm15:themeFamily xmlns:thm15="http://schemas.microsoft.com/office/thememl/2012/main" name="Office Theme" id="{62F939B6-93AF-4DB8-9C6B-D6C7DFDC589F}" vid="{4A3C46E8-61CC-4603-A589-7422A47A8E4A}"/>

--- a/Analiza pametne logistike globalnog uvoza (1).pptx
+++ b/Analiza pametne logistike globalnog uvoza (1).pptx
@@ -14,6 +14,17 @@
     <p:sldId id="262" r:id="rId9"/>
     <p:sldId id="264" r:id="rId10"/>
     <p:sldId id="263" r:id="rId11"/>
+    <p:sldId id="268" r:id="rId12"/>
+    <p:sldId id="265" r:id="rId13"/>
+    <p:sldId id="267" r:id="rId14"/>
+    <p:sldId id="266" r:id="rId15"/>
+    <p:sldId id="272" r:id="rId16"/>
+    <p:sldId id="273" r:id="rId17"/>
+    <p:sldId id="274" r:id="rId18"/>
+    <p:sldId id="275" r:id="rId19"/>
+    <p:sldId id="276" r:id="rId20"/>
+    <p:sldId id="277" r:id="rId21"/>
+    <p:sldId id="280" r:id="rId22"/>
   </p:sldIdLst>
   <p:sldSz cx="12192000" cy="6858000"/>
   <p:notesSz cx="6858000" cy="9144000"/>
@@ -3318,6 +3329,1364 @@
 </p:sld>
 </file>
 
+<file path=ppt/slides/slide10.xml><?xml version="1.0" encoding="utf-8"?>
+<p:sld xmlns:a="http://schemas.openxmlformats.org/drawingml/2006/main" xmlns:r="http://schemas.openxmlformats.org/officeDocument/2006/relationships" xmlns:p="http://schemas.openxmlformats.org/presentationml/2006/main">
+  <p:cSld>
+    <p:spTree>
+      <p:nvGrpSpPr>
+        <p:cNvPr id="1" name=""/>
+        <p:cNvGrpSpPr/>
+        <p:nvPr/>
+      </p:nvGrpSpPr>
+      <p:grpSpPr/>
+      <p:sp>
+        <p:nvSpPr>
+          <p:cNvPr id="2" name="Title 1"/>
+          <p:cNvSpPr>
+            <a:spLocks noGrp="1"/>
+          </p:cNvSpPr>
+          <p:nvPr>
+            <p:ph type="title"/>
+          </p:nvPr>
+        </p:nvSpPr>
+        <p:spPr/>
+        <p:txBody>
+          <a:bodyPr/>
+          <a:p>
+            <a:endParaRPr lang="en-GB" altLang="en-US"/>
+          </a:p>
+        </p:txBody>
+      </p:sp>
+      <p:sp>
+        <p:nvSpPr>
+          <p:cNvPr id="3" name="Content Placeholder 2"/>
+          <p:cNvSpPr>
+            <a:spLocks noGrp="1"/>
+          </p:cNvSpPr>
+          <p:nvPr>
+            <p:ph idx="1"/>
+          </p:nvPr>
+        </p:nvSpPr>
+        <p:spPr/>
+        <p:txBody>
+          <a:bodyPr/>
+          <a:p>
+            <a:r>
+              <a:rPr lang="en-US" altLang="en-GB"/>
+              <a:t>- lokacija</a:t>
+            </a:r>
+            <a:endParaRPr lang="en-US" altLang="en-GB"/>
+          </a:p>
+          <a:p>
+            <a:r>
+              <a:rPr lang="sr-Latn-RS" altLang="en-US"/>
+              <a:t>  </a:t>
+            </a:r>
+            <a:r>
+              <a:rPr lang="en-US" altLang="en-GB"/>
+              <a:t>-- location_name</a:t>
+            </a:r>
+            <a:endParaRPr lang="en-US" altLang="en-GB"/>
+          </a:p>
+          <a:p>
+            <a:r>
+              <a:rPr lang="sr-Latn-RS" altLang="en-US"/>
+              <a:t>  </a:t>
+            </a:r>
+            <a:r>
+              <a:rPr lang="en-US" altLang="en-GB"/>
+              <a:t>-- latitude</a:t>
+            </a:r>
+            <a:endParaRPr lang="en-US" altLang="en-GB"/>
+          </a:p>
+          <a:p>
+            <a:r>
+              <a:rPr lang="sr-Latn-RS" altLang="en-US"/>
+              <a:t>  </a:t>
+            </a:r>
+            <a:r>
+              <a:rPr lang="en-US" altLang="en-GB"/>
+              <a:t>-- longitude</a:t>
+            </a:r>
+            <a:endParaRPr lang="en-US" altLang="en-GB"/>
+          </a:p>
+        </p:txBody>
+      </p:sp>
+    </p:spTree>
+  </p:cSld>
+  <p:clrMapOvr>
+    <a:masterClrMapping/>
+  </p:clrMapOvr>
+</p:sld>
+</file>
+
+<file path=ppt/slides/slide11.xml><?xml version="1.0" encoding="utf-8"?>
+<p:sld xmlns:a="http://schemas.openxmlformats.org/drawingml/2006/main" xmlns:r="http://schemas.openxmlformats.org/officeDocument/2006/relationships" xmlns:p="http://schemas.openxmlformats.org/presentationml/2006/main">
+  <p:cSld>
+    <p:spTree>
+      <p:nvGrpSpPr>
+        <p:cNvPr id="1" name=""/>
+        <p:cNvGrpSpPr/>
+        <p:nvPr/>
+      </p:nvGrpSpPr>
+      <p:grpSpPr/>
+      <p:sp>
+        <p:nvSpPr>
+          <p:cNvPr id="2" name="Title 1"/>
+          <p:cNvSpPr>
+            <a:spLocks noGrp="1"/>
+          </p:cNvSpPr>
+          <p:nvPr>
+            <p:ph type="title"/>
+          </p:nvPr>
+        </p:nvSpPr>
+        <p:spPr/>
+        <p:txBody>
+          <a:bodyPr/>
+          <a:p>
+            <a:endParaRPr lang="en-GB" altLang="en-US"/>
+          </a:p>
+        </p:txBody>
+      </p:sp>
+      <p:sp>
+        <p:nvSpPr>
+          <p:cNvPr id="3" name="Content Placeholder 2"/>
+          <p:cNvSpPr>
+            <a:spLocks noGrp="1"/>
+          </p:cNvSpPr>
+          <p:nvPr>
+            <p:ph idx="1"/>
+          </p:nvPr>
+        </p:nvSpPr>
+        <p:spPr/>
+        <p:txBody>
+          <a:bodyPr/>
+          <a:p>
+            <a:r>
+              <a:rPr lang="sr-Latn-RS" altLang="en-US" sz="2800">
+                <a:sym typeface="+mn-ea"/>
+              </a:rPr>
+              <a:t>- </a:t>
+            </a:r>
+            <a:r>
+              <a:rPr lang="en-US" altLang="en-GB" sz="2800">
+                <a:sym typeface="+mn-ea"/>
+              </a:rPr>
+              <a:t>kretanje</a:t>
+            </a:r>
+            <a:endParaRPr lang="en-US" altLang="en-GB" sz="2800"/>
+          </a:p>
+          <a:p>
+            <a:r>
+              <a:rPr lang="sr-Latn-RS" altLang="en-US" sz="2800">
+                <a:sym typeface="+mn-ea"/>
+              </a:rPr>
+              <a:t>  --</a:t>
+            </a:r>
+            <a:r>
+              <a:rPr lang="en-US" altLang="en-GB" sz="2800">
+                <a:sym typeface="+mn-ea"/>
+              </a:rPr>
+              <a:t> speed_knots</a:t>
+            </a:r>
+            <a:endParaRPr lang="en-US" altLang="en-GB" sz="2800">
+              <a:sym typeface="+mn-ea"/>
+            </a:endParaRPr>
+          </a:p>
+          <a:p>
+            <a:r>
+              <a:rPr lang="sr-Latn-RS" altLang="en-US" sz="2800">
+                <a:sym typeface="+mn-ea"/>
+              </a:rPr>
+              <a:t>  -- h</a:t>
+            </a:r>
+            <a:r>
+              <a:rPr lang="en-US" altLang="en-GB" sz="2800">
+                <a:sym typeface="+mn-ea"/>
+              </a:rPr>
+              <a:t>eading_deg</a:t>
+            </a:r>
+            <a:endParaRPr lang="en-US" altLang="en-GB" sz="2800">
+              <a:sym typeface="+mn-ea"/>
+            </a:endParaRPr>
+          </a:p>
+          <a:p>
+            <a:r>
+              <a:rPr lang="sr-Latn-RS" altLang="en-US" sz="2800">
+                <a:sym typeface="+mn-ea"/>
+              </a:rPr>
+              <a:t>-</a:t>
+            </a:r>
+            <a:r>
+              <a:rPr lang="en-US" altLang="en-GB" sz="2800">
+                <a:sym typeface="+mn-ea"/>
+              </a:rPr>
+              <a:t> podaci sa senzora</a:t>
+            </a:r>
+            <a:endParaRPr lang="en-US" altLang="en-GB" sz="2800">
+              <a:sym typeface="+mn-ea"/>
+            </a:endParaRPr>
+          </a:p>
+          <a:p>
+            <a:r>
+              <a:rPr lang="sr-Latn-RS" altLang="en-US" sz="2800">
+                <a:sym typeface="+mn-ea"/>
+              </a:rPr>
+              <a:t>  --</a:t>
+            </a:r>
+            <a:r>
+              <a:rPr lang="en-US" altLang="en-GB" sz="2800">
+                <a:sym typeface="+mn-ea"/>
+              </a:rPr>
+              <a:t> sensor_type</a:t>
+            </a:r>
+            <a:endParaRPr lang="en-US" altLang="en-GB" sz="2800"/>
+          </a:p>
+          <a:p>
+            <a:r>
+              <a:rPr lang="sr-Latn-RS" altLang="en-US" sz="2800">
+                <a:sym typeface="+mn-ea"/>
+              </a:rPr>
+              <a:t>  --</a:t>
+            </a:r>
+            <a:r>
+              <a:rPr lang="en-US" altLang="en-GB" sz="2800">
+                <a:sym typeface="+mn-ea"/>
+              </a:rPr>
+              <a:t> signal_quality</a:t>
+            </a:r>
+            <a:endParaRPr lang="en-US" altLang="en-GB" sz="2800"/>
+          </a:p>
+          <a:p>
+            <a:r>
+              <a:rPr lang="sr-Latn-RS" altLang="en-US" sz="2800">
+                <a:sym typeface="+mn-ea"/>
+              </a:rPr>
+              <a:t>  --</a:t>
+            </a:r>
+            <a:r>
+              <a:rPr lang="en-US" altLang="en-GB" sz="2800">
+                <a:sym typeface="+mn-ea"/>
+              </a:rPr>
+              <a:t> temperature_c</a:t>
+            </a:r>
+            <a:endParaRPr lang="en-US" altLang="en-GB" sz="2800"/>
+          </a:p>
+          <a:p>
+            <a:r>
+              <a:rPr lang="sr-Latn-RS" altLang="en-US" sz="2800">
+                <a:sym typeface="+mn-ea"/>
+              </a:rPr>
+              <a:t>  --</a:t>
+            </a:r>
+            <a:r>
+              <a:rPr lang="en-US" altLang="en-GB" sz="2800">
+                <a:sym typeface="+mn-ea"/>
+              </a:rPr>
+              <a:t> humidity_pct</a:t>
+            </a:r>
+            <a:endParaRPr lang="en-US" altLang="en-GB" sz="2800"/>
+          </a:p>
+          <a:p>
+            <a:r>
+              <a:rPr lang="sr-Latn-RS" altLang="en-US" sz="2800">
+                <a:sym typeface="+mn-ea"/>
+              </a:rPr>
+              <a:t>  --</a:t>
+            </a:r>
+            <a:r>
+              <a:rPr lang="en-US" altLang="en-GB" sz="2800">
+                <a:sym typeface="+mn-ea"/>
+              </a:rPr>
+              <a:t> shock_g</a:t>
+            </a:r>
+            <a:endParaRPr lang="en-US" altLang="en-GB" sz="2800">
+              <a:sym typeface="+mn-ea"/>
+            </a:endParaRPr>
+          </a:p>
+          <a:p>
+            <a:endParaRPr lang="en-US" altLang="en-GB" sz="2800">
+              <a:sym typeface="+mn-ea"/>
+            </a:endParaRPr>
+          </a:p>
+        </p:txBody>
+      </p:sp>
+    </p:spTree>
+  </p:cSld>
+  <p:clrMapOvr>
+    <a:masterClrMapping/>
+  </p:clrMapOvr>
+</p:sld>
+</file>
+
+<file path=ppt/slides/slide12.xml><?xml version="1.0" encoding="utf-8"?>
+<p:sld xmlns:a="http://schemas.openxmlformats.org/drawingml/2006/main" xmlns:r="http://schemas.openxmlformats.org/officeDocument/2006/relationships" xmlns:p="http://schemas.openxmlformats.org/presentationml/2006/main">
+  <p:cSld>
+    <p:spTree>
+      <p:nvGrpSpPr>
+        <p:cNvPr id="1" name=""/>
+        <p:cNvGrpSpPr/>
+        <p:nvPr/>
+      </p:nvGrpSpPr>
+      <p:grpSpPr/>
+      <p:sp>
+        <p:nvSpPr>
+          <p:cNvPr id="2" name="Title 1"/>
+          <p:cNvSpPr>
+            <a:spLocks noGrp="1"/>
+          </p:cNvSpPr>
+          <p:nvPr>
+            <p:ph type="title"/>
+          </p:nvPr>
+        </p:nvSpPr>
+        <p:spPr/>
+        <p:txBody>
+          <a:bodyPr/>
+          <a:p>
+            <a:endParaRPr lang="en-GB" altLang="en-US"/>
+          </a:p>
+        </p:txBody>
+      </p:sp>
+      <p:sp>
+        <p:nvSpPr>
+          <p:cNvPr id="3" name="Content Placeholder 2"/>
+          <p:cNvSpPr>
+            <a:spLocks noGrp="1"/>
+          </p:cNvSpPr>
+          <p:nvPr>
+            <p:ph idx="1"/>
+          </p:nvPr>
+        </p:nvSpPr>
+        <p:spPr/>
+        <p:txBody>
+          <a:bodyPr/>
+          <a:p>
+            <a:r>
+              <a:rPr lang="sr-Latn-RS" altLang="en-US">
+                <a:sym typeface="+mn-ea"/>
+              </a:rPr>
+              <a:t>-</a:t>
+            </a:r>
+            <a:r>
+              <a:rPr lang="en-US" altLang="en-GB">
+                <a:sym typeface="+mn-ea"/>
+              </a:rPr>
+              <a:t> operativni uticaj</a:t>
+            </a:r>
+            <a:endParaRPr lang="en-US" altLang="en-GB"/>
+          </a:p>
+          <a:p>
+            <a:r>
+              <a:rPr lang="sr-Latn-RS" altLang="en-US">
+                <a:sym typeface="+mn-ea"/>
+              </a:rPr>
+              <a:t>  --</a:t>
+            </a:r>
+            <a:r>
+              <a:rPr lang="en-US" altLang="en-GB">
+                <a:sym typeface="+mn-ea"/>
+              </a:rPr>
+              <a:t> delay_added_hours</a:t>
+            </a:r>
+            <a:endParaRPr lang="en-US" altLang="en-GB"/>
+          </a:p>
+          <a:p>
+            <a:r>
+              <a:rPr lang="sr-Latn-RS" altLang="en-US">
+                <a:sym typeface="+mn-ea"/>
+              </a:rPr>
+              <a:t>  --</a:t>
+            </a:r>
+            <a:r>
+              <a:rPr lang="en-US" altLang="en-GB">
+                <a:sym typeface="+mn-ea"/>
+              </a:rPr>
+              <a:t> port_wait_hours</a:t>
+            </a:r>
+            <a:endParaRPr lang="en-US" altLang="en-GB"/>
+          </a:p>
+          <a:p>
+            <a:r>
+              <a:rPr lang="sr-Latn-RS" altLang="en-US">
+                <a:sym typeface="+mn-ea"/>
+              </a:rPr>
+              <a:t>  --</a:t>
+            </a:r>
+            <a:r>
+              <a:rPr lang="en-US" altLang="en-GB">
+                <a:sym typeface="+mn-ea"/>
+              </a:rPr>
+              <a:t> risk_score_delta</a:t>
+            </a:r>
+            <a:endParaRPr lang="en-GB" altLang="en-US"/>
+          </a:p>
+          <a:p>
+            <a:endParaRPr lang="en-GB" altLang="en-US"/>
+          </a:p>
+        </p:txBody>
+      </p:sp>
+    </p:spTree>
+  </p:cSld>
+  <p:clrMapOvr>
+    <a:masterClrMapping/>
+  </p:clrMapOvr>
+</p:sld>
+</file>
+
+<file path=ppt/slides/slide13.xml><?xml version="1.0" encoding="utf-8"?>
+<p:sld xmlns:a="http://schemas.openxmlformats.org/drawingml/2006/main" xmlns:r="http://schemas.openxmlformats.org/officeDocument/2006/relationships" xmlns:p="http://schemas.openxmlformats.org/presentationml/2006/main">
+  <p:cSld>
+    <p:spTree>
+      <p:nvGrpSpPr>
+        <p:cNvPr id="1" name=""/>
+        <p:cNvGrpSpPr/>
+        <p:nvPr/>
+      </p:nvGrpSpPr>
+      <p:grpSpPr/>
+      <p:sp>
+        <p:nvSpPr>
+          <p:cNvPr id="2" name="Title 1"/>
+          <p:cNvSpPr>
+            <a:spLocks noGrp="1"/>
+          </p:cNvSpPr>
+          <p:nvPr>
+            <p:ph type="title"/>
+          </p:nvPr>
+        </p:nvSpPr>
+        <p:spPr/>
+        <p:txBody>
+          <a:bodyPr/>
+          <a:p>
+            <a:endParaRPr lang="en-GB" altLang="en-US"/>
+          </a:p>
+        </p:txBody>
+      </p:sp>
+      <p:sp>
+        <p:nvSpPr>
+          <p:cNvPr id="3" name="Content Placeholder 2"/>
+          <p:cNvSpPr>
+            <a:spLocks noGrp="1"/>
+          </p:cNvSpPr>
+          <p:nvPr>
+            <p:ph idx="1"/>
+          </p:nvPr>
+        </p:nvSpPr>
+        <p:spPr/>
+        <p:txBody>
+          <a:bodyPr/>
+          <a:p>
+            <a:r>
+              <a:rPr lang="sr-Latn-RS" altLang="en-US"/>
+              <a:t>-</a:t>
+            </a:r>
+            <a:r>
+              <a:rPr lang="en-US" altLang="en-GB"/>
+              <a:t> uticaj na </a:t>
+            </a:r>
+            <a:r>
+              <a:rPr lang="" altLang="en-US"/>
+              <a:t>ž</a:t>
+            </a:r>
+            <a:r>
+              <a:rPr lang="en-US" altLang="en-GB"/>
+              <a:t>ivotnu sredinu</a:t>
+            </a:r>
+            <a:endParaRPr lang="en-US" altLang="en-GB"/>
+          </a:p>
+          <a:p>
+            <a:r>
+              <a:rPr lang="sr-Latn-RS" altLang="en-US"/>
+              <a:t>  --</a:t>
+            </a:r>
+            <a:r>
+              <a:rPr lang="en-US" altLang="en-GB"/>
+              <a:t> fuel_consumed_lt</a:t>
+            </a:r>
+            <a:endParaRPr lang="en-US" altLang="en-GB"/>
+          </a:p>
+          <a:p>
+            <a:r>
+              <a:rPr lang="sr-Latn-RS" altLang="en-US"/>
+              <a:t>  --</a:t>
+            </a:r>
+            <a:r>
+              <a:rPr lang="en-US" altLang="en-GB"/>
+              <a:t> co2_kg</a:t>
+            </a:r>
+            <a:endParaRPr lang="en-US" altLang="en-GB"/>
+          </a:p>
+          <a:p>
+            <a:r>
+              <a:rPr lang="sr-Latn-RS" altLang="en-US"/>
+              <a:t>-</a:t>
+            </a:r>
+            <a:r>
+              <a:rPr lang="en-US" altLang="en-GB"/>
+              <a:t> pra</a:t>
+            </a:r>
+            <a:r>
+              <a:rPr lang="" altLang="en-US"/>
+              <a:t>ć</a:t>
+            </a:r>
+            <a:r>
+              <a:rPr lang="en-US" altLang="en-GB"/>
+              <a:t>enje</a:t>
+            </a:r>
+            <a:endParaRPr lang="en-US" altLang="en-GB"/>
+          </a:p>
+          <a:p>
+            <a:r>
+              <a:rPr lang="sr-Latn-RS" altLang="en-US"/>
+              <a:t>  -- </a:t>
+            </a:r>
+            <a:r>
+              <a:rPr lang="en-US" altLang="en-GB"/>
+              <a:t>anomaly_flag</a:t>
+            </a:r>
+            <a:endParaRPr lang="en-US" altLang="en-GB"/>
+          </a:p>
+          <a:p>
+            <a:r>
+              <a:rPr lang="sr-Latn-RS" altLang="en-US"/>
+              <a:t>  --</a:t>
+            </a:r>
+            <a:r>
+              <a:rPr lang="en-US" altLang="en-GB"/>
+              <a:t> alert_sent</a:t>
+            </a:r>
+            <a:endParaRPr lang="en-US" altLang="en-GB"/>
+          </a:p>
+          <a:p>
+            <a:endParaRPr lang="en-US" altLang="en-GB"/>
+          </a:p>
+          <a:p>
+            <a:endParaRPr lang="en-US" altLang="en-GB"/>
+          </a:p>
+        </p:txBody>
+      </p:sp>
+    </p:spTree>
+  </p:cSld>
+  <p:clrMapOvr>
+    <a:masterClrMapping/>
+  </p:clrMapOvr>
+</p:sld>
+</file>
+
+<file path=ppt/slides/slide14.xml><?xml version="1.0" encoding="utf-8"?>
+<p:sld xmlns:a="http://schemas.openxmlformats.org/drawingml/2006/main" xmlns:r="http://schemas.openxmlformats.org/officeDocument/2006/relationships" xmlns:p="http://schemas.openxmlformats.org/presentationml/2006/main">
+  <p:cSld>
+    <p:spTree>
+      <p:nvGrpSpPr>
+        <p:cNvPr id="1" name=""/>
+        <p:cNvGrpSpPr/>
+        <p:nvPr/>
+      </p:nvGrpSpPr>
+      <p:grpSpPr/>
+      <p:sp>
+        <p:nvSpPr>
+          <p:cNvPr id="2" name="Title 1"/>
+          <p:cNvSpPr>
+            <a:spLocks noGrp="1"/>
+          </p:cNvSpPr>
+          <p:nvPr>
+            <p:ph type="title"/>
+          </p:nvPr>
+        </p:nvSpPr>
+        <p:spPr/>
+        <p:txBody>
+          <a:bodyPr/>
+          <a:p>
+            <a:endParaRPr lang="en-GB" altLang="en-US"/>
+          </a:p>
+        </p:txBody>
+      </p:sp>
+      <p:sp>
+        <p:nvSpPr>
+          <p:cNvPr id="3" name="Content Placeholder 2"/>
+          <p:cNvSpPr>
+            <a:spLocks noGrp="1"/>
+          </p:cNvSpPr>
+          <p:nvPr>
+            <p:ph idx="1"/>
+          </p:nvPr>
+        </p:nvSpPr>
+        <p:spPr/>
+        <p:txBody>
+          <a:bodyPr/>
+          <a:p>
+            <a:r>
+              <a:rPr lang="en-US" altLang="en-GB"/>
+              <a:t>shipments (isporuke):</a:t>
+            </a:r>
+            <a:endParaRPr lang="en-US" altLang="en-US"/>
+          </a:p>
+          <a:p>
+            <a:r>
+              <a:rPr lang="sr-Latn-RS" altLang="en-US"/>
+              <a:t>-</a:t>
+            </a:r>
+            <a:r>
+              <a:rPr lang="en-US" altLang="en-GB"/>
+              <a:t> shipment_id</a:t>
+            </a:r>
+            <a:endParaRPr lang="en-US" altLang="en-GB"/>
+          </a:p>
+          <a:p>
+            <a:r>
+              <a:rPr lang="sr-Latn-RS" altLang="en-US"/>
+              <a:t>-</a:t>
+            </a:r>
+            <a:r>
+              <a:rPr lang="en-US" altLang="en-GB"/>
+              <a:t> osnovni podaci</a:t>
+            </a:r>
+            <a:endParaRPr lang="en-US" altLang="en-GB"/>
+          </a:p>
+          <a:p>
+            <a:r>
+              <a:rPr lang="sr-Latn-RS" altLang="en-US"/>
+              <a:t>  --</a:t>
+            </a:r>
+            <a:r>
+              <a:rPr lang="en-US" altLang="en-GB"/>
+              <a:t> carrier</a:t>
+            </a:r>
+            <a:endParaRPr lang="en-US" altLang="en-GB"/>
+          </a:p>
+          <a:p>
+            <a:r>
+              <a:rPr lang="sr-Latn-RS" altLang="en-US"/>
+              <a:t>  --</a:t>
+            </a:r>
+            <a:r>
+              <a:rPr lang="en-US" altLang="en-GB"/>
+              <a:t> transport_mode</a:t>
+            </a:r>
+            <a:endParaRPr lang="en-US" altLang="en-GB"/>
+          </a:p>
+          <a:p>
+            <a:r>
+              <a:rPr lang="sr-Latn-RS" altLang="en-US"/>
+              <a:t>  --</a:t>
+            </a:r>
+            <a:r>
+              <a:rPr lang="en-US" altLang="en-GB"/>
+              <a:t> goods_category</a:t>
+            </a:r>
+            <a:endParaRPr lang="en-US" altLang="en-GB"/>
+          </a:p>
+          <a:p>
+            <a:r>
+              <a:rPr lang="sr-Latn-RS" altLang="en-US"/>
+              <a:t>  --</a:t>
+            </a:r>
+            <a:r>
+              <a:rPr lang="en-US" altLang="en-GB"/>
+              <a:t> status</a:t>
+            </a:r>
+            <a:endParaRPr lang="en-US" altLang="en-GB"/>
+          </a:p>
+          <a:p>
+            <a:r>
+              <a:rPr lang="sr-Latn-RS" altLang="en-US"/>
+              <a:t>  --</a:t>
+            </a:r>
+            <a:r>
+              <a:rPr lang="en-US" altLang="en-GB"/>
+              <a:t> priority_level</a:t>
+            </a:r>
+            <a:endParaRPr lang="en-US" altLang="en-GB"/>
+          </a:p>
+          <a:p>
+            <a:endParaRPr lang="en-US" altLang="en-GB"/>
+          </a:p>
+        </p:txBody>
+      </p:sp>
+    </p:spTree>
+  </p:cSld>
+  <p:clrMapOvr>
+    <a:masterClrMapping/>
+  </p:clrMapOvr>
+</p:sld>
+</file>
+
+<file path=ppt/slides/slide15.xml><?xml version="1.0" encoding="utf-8"?>
+<p:sld xmlns:a="http://schemas.openxmlformats.org/drawingml/2006/main" xmlns:r="http://schemas.openxmlformats.org/officeDocument/2006/relationships" xmlns:p="http://schemas.openxmlformats.org/presentationml/2006/main">
+  <p:cSld>
+    <p:spTree>
+      <p:nvGrpSpPr>
+        <p:cNvPr id="1" name=""/>
+        <p:cNvGrpSpPr/>
+        <p:nvPr/>
+      </p:nvGrpSpPr>
+      <p:grpSpPr/>
+      <p:sp>
+        <p:nvSpPr>
+          <p:cNvPr id="2" name="Title 1"/>
+          <p:cNvSpPr>
+            <a:spLocks noGrp="1"/>
+          </p:cNvSpPr>
+          <p:nvPr>
+            <p:ph type="title"/>
+          </p:nvPr>
+        </p:nvSpPr>
+        <p:spPr/>
+        <p:txBody>
+          <a:bodyPr/>
+          <a:p>
+            <a:endParaRPr lang="en-GB" altLang="en-US"/>
+          </a:p>
+        </p:txBody>
+      </p:sp>
+      <p:sp>
+        <p:nvSpPr>
+          <p:cNvPr id="3" name="Content Placeholder 2"/>
+          <p:cNvSpPr>
+            <a:spLocks noGrp="1"/>
+          </p:cNvSpPr>
+          <p:nvPr>
+            <p:ph idx="1"/>
+          </p:nvPr>
+        </p:nvSpPr>
+        <p:spPr/>
+        <p:txBody>
+          <a:bodyPr/>
+          <a:p>
+            <a:r>
+              <a:rPr lang="sr-Latn-RS" altLang="en-US"/>
+              <a:t>- </a:t>
+            </a:r>
+            <a:r>
+              <a:rPr lang="en-US" altLang="en-GB"/>
+              <a:t>podaci o ruti</a:t>
+            </a:r>
+            <a:endParaRPr lang="en-US" altLang="en-GB"/>
+          </a:p>
+          <a:p>
+            <a:r>
+              <a:rPr lang="sr-Latn-RS" altLang="en-US"/>
+              <a:t>  --</a:t>
+            </a:r>
+            <a:r>
+              <a:rPr lang="en-US" altLang="en-GB"/>
+              <a:t> origin_port</a:t>
+            </a:r>
+            <a:endParaRPr lang="en-US" altLang="en-GB"/>
+          </a:p>
+          <a:p>
+            <a:r>
+              <a:rPr lang="sr-Latn-RS" altLang="en-US"/>
+              <a:t>  -- </a:t>
+            </a:r>
+            <a:r>
+              <a:rPr lang="en-US" altLang="en-GB"/>
+              <a:t> destination_port</a:t>
+            </a:r>
+            <a:endParaRPr lang="en-US" altLang="en-GB"/>
+          </a:p>
+          <a:p>
+            <a:r>
+              <a:rPr lang="sr-Latn-RS" altLang="en-US"/>
+              <a:t>  --</a:t>
+            </a:r>
+            <a:r>
+              <a:rPr lang="en-US" altLang="en-GB"/>
+              <a:t> distance_km</a:t>
+            </a:r>
+            <a:endParaRPr lang="en-US" altLang="en-GB"/>
+          </a:p>
+          <a:p>
+            <a:r>
+              <a:rPr lang="sr-Latn-RS" altLang="en-US"/>
+              <a:t>  --</a:t>
+            </a:r>
+            <a:r>
+              <a:rPr lang="en-US" altLang="en-GB"/>
+              <a:t> num_stops</a:t>
+            </a:r>
+            <a:endParaRPr lang="en-US" altLang="en-GB"/>
+          </a:p>
+        </p:txBody>
+      </p:sp>
+      <p:sp>
+        <p:nvSpPr>
+          <p:cNvPr id="4" name="Text Box 3"/>
+          <p:cNvSpPr txBox="1"/>
+          <p:nvPr/>
+        </p:nvSpPr>
+        <p:spPr>
+          <a:xfrm>
+            <a:off x="3964940" y="5659755"/>
+            <a:ext cx="4064000" cy="368300"/>
+          </a:xfrm>
+          <a:prstGeom prst="rect">
+            <a:avLst/>
+          </a:prstGeom>
+          <a:noFill/>
+        </p:spPr>
+        <p:txBody>
+          <a:bodyPr wrap="square" rtlCol="0">
+            <a:spAutoFit/>
+          </a:bodyPr>
+          <a:p>
+            <a:endParaRPr lang="en-GB" altLang="en-US"/>
+          </a:p>
+        </p:txBody>
+      </p:sp>
+    </p:spTree>
+  </p:cSld>
+  <p:clrMapOvr>
+    <a:masterClrMapping/>
+  </p:clrMapOvr>
+</p:sld>
+</file>
+
+<file path=ppt/slides/slide16.xml><?xml version="1.0" encoding="utf-8"?>
+<p:sld xmlns:a="http://schemas.openxmlformats.org/drawingml/2006/main" xmlns:r="http://schemas.openxmlformats.org/officeDocument/2006/relationships" xmlns:p="http://schemas.openxmlformats.org/presentationml/2006/main">
+  <p:cSld>
+    <p:spTree>
+      <p:nvGrpSpPr>
+        <p:cNvPr id="1" name=""/>
+        <p:cNvGrpSpPr/>
+        <p:nvPr/>
+      </p:nvGrpSpPr>
+      <p:grpSpPr/>
+      <p:sp>
+        <p:nvSpPr>
+          <p:cNvPr id="2" name="Title 1"/>
+          <p:cNvSpPr>
+            <a:spLocks noGrp="1"/>
+          </p:cNvSpPr>
+          <p:nvPr>
+            <p:ph type="title"/>
+          </p:nvPr>
+        </p:nvSpPr>
+        <p:spPr/>
+        <p:txBody>
+          <a:bodyPr/>
+          <a:p>
+            <a:endParaRPr lang="en-GB" altLang="en-US"/>
+          </a:p>
+        </p:txBody>
+      </p:sp>
+      <p:sp>
+        <p:nvSpPr>
+          <p:cNvPr id="3" name="Content Placeholder 2"/>
+          <p:cNvSpPr>
+            <a:spLocks noGrp="1"/>
+          </p:cNvSpPr>
+          <p:nvPr>
+            <p:ph idx="1"/>
+          </p:nvPr>
+        </p:nvSpPr>
+        <p:spPr/>
+        <p:txBody>
+          <a:bodyPr/>
+          <a:p>
+            <a:r>
+              <a:rPr lang="en-US" altLang="en-GB"/>
+              <a:t>- vremenski podaci</a:t>
+            </a:r>
+            <a:endParaRPr lang="en-US" altLang="en-GB"/>
+          </a:p>
+          <a:p>
+            <a:r>
+              <a:rPr lang="sr-Latn-RS" altLang="en-US"/>
+              <a:t>  </a:t>
+            </a:r>
+            <a:r>
+              <a:rPr lang="en-US" altLang="en-GB"/>
+              <a:t>-- created_date</a:t>
+            </a:r>
+            <a:endParaRPr lang="en-US" altLang="en-GB"/>
+          </a:p>
+          <a:p>
+            <a:r>
+              <a:rPr lang="sr-Latn-RS" altLang="en-US"/>
+              <a:t>  </a:t>
+            </a:r>
+            <a:r>
+              <a:rPr lang="en-US" altLang="en-GB"/>
+              <a:t>-- eta_date</a:t>
+            </a:r>
+            <a:endParaRPr lang="en-US" altLang="en-GB"/>
+          </a:p>
+          <a:p>
+            <a:r>
+              <a:rPr lang="sr-Latn-RS" altLang="en-US"/>
+              <a:t>  -- </a:t>
+            </a:r>
+            <a:r>
+              <a:rPr lang="en-US" altLang="en-GB"/>
+              <a:t>transit_hours</a:t>
+            </a:r>
+            <a:endParaRPr lang="en-US" altLang="en-GB"/>
+          </a:p>
+          <a:p>
+            <a:r>
+              <a:rPr lang="sr-Latn-RS" altLang="en-US"/>
+              <a:t>  -- </a:t>
+            </a:r>
+            <a:r>
+              <a:rPr lang="en-US" altLang="en-GB"/>
+              <a:t>delay_hours</a:t>
+            </a:r>
+            <a:endParaRPr lang="en-US" altLang="en-GB"/>
+          </a:p>
+          <a:p>
+            <a:pPr marL="0" indent="0">
+              <a:buNone/>
+            </a:pPr>
+            <a:endParaRPr lang="en-US" altLang="en-GB"/>
+          </a:p>
+        </p:txBody>
+      </p:sp>
+    </p:spTree>
+  </p:cSld>
+  <p:clrMapOvr>
+    <a:masterClrMapping/>
+  </p:clrMapOvr>
+</p:sld>
+</file>
+
+<file path=ppt/slides/slide17.xml><?xml version="1.0" encoding="utf-8"?>
+<p:sld xmlns:a="http://schemas.openxmlformats.org/drawingml/2006/main" xmlns:r="http://schemas.openxmlformats.org/officeDocument/2006/relationships" xmlns:p="http://schemas.openxmlformats.org/presentationml/2006/main">
+  <p:cSld>
+    <p:spTree>
+      <p:nvGrpSpPr>
+        <p:cNvPr id="1" name=""/>
+        <p:cNvGrpSpPr/>
+        <p:nvPr/>
+      </p:nvGrpSpPr>
+      <p:grpSpPr/>
+      <p:sp>
+        <p:nvSpPr>
+          <p:cNvPr id="2" name="Title 1"/>
+          <p:cNvSpPr>
+            <a:spLocks noGrp="1"/>
+          </p:cNvSpPr>
+          <p:nvPr>
+            <p:ph type="title"/>
+          </p:nvPr>
+        </p:nvSpPr>
+        <p:spPr/>
+        <p:txBody>
+          <a:bodyPr/>
+          <a:p>
+            <a:endParaRPr lang="en-GB" altLang="en-US"/>
+          </a:p>
+        </p:txBody>
+      </p:sp>
+      <p:sp>
+        <p:nvSpPr>
+          <p:cNvPr id="3" name="Content Placeholder 2"/>
+          <p:cNvSpPr>
+            <a:spLocks noGrp="1"/>
+          </p:cNvSpPr>
+          <p:nvPr>
+            <p:ph idx="1"/>
+          </p:nvPr>
+        </p:nvSpPr>
+        <p:spPr/>
+        <p:txBody>
+          <a:bodyPr/>
+          <a:p>
+            <a:r>
+              <a:rPr lang="sr-Latn-RS" altLang="en-US">
+                <a:sym typeface="+mn-ea"/>
+              </a:rPr>
+              <a:t>- </a:t>
+            </a:r>
+            <a:r>
+              <a:rPr lang="en-US" altLang="en-GB">
+                <a:sym typeface="+mn-ea"/>
+              </a:rPr>
+              <a:t>finansijski podaci</a:t>
+            </a:r>
+            <a:endParaRPr lang="en-US" altLang="en-GB"/>
+          </a:p>
+          <a:p>
+            <a:r>
+              <a:rPr lang="sr-Latn-RS" altLang="en-US">
+                <a:sym typeface="+mn-ea"/>
+              </a:rPr>
+              <a:t>  -- </a:t>
+            </a:r>
+            <a:r>
+              <a:rPr lang="en-US" altLang="en-GB">
+                <a:sym typeface="+mn-ea"/>
+              </a:rPr>
+              <a:t>currency</a:t>
+            </a:r>
+            <a:endParaRPr lang="en-US" altLang="en-GB"/>
+          </a:p>
+          <a:p>
+            <a:r>
+              <a:rPr lang="sr-Latn-RS" altLang="en-US">
+                <a:sym typeface="+mn-ea"/>
+              </a:rPr>
+              <a:t>  -- </a:t>
+            </a:r>
+            <a:r>
+              <a:rPr lang="en-US" altLang="en-GB">
+                <a:sym typeface="+mn-ea"/>
+              </a:rPr>
+              <a:t>value_usd</a:t>
+            </a:r>
+            <a:endParaRPr lang="en-US" altLang="en-GB"/>
+          </a:p>
+          <a:p>
+            <a:r>
+              <a:rPr lang="sr-Latn-RS" altLang="en-US">
+                <a:sym typeface="+mn-ea"/>
+              </a:rPr>
+              <a:t>  -- </a:t>
+            </a:r>
+            <a:r>
+              <a:rPr lang="en-US" altLang="en-GB">
+                <a:sym typeface="+mn-ea"/>
+              </a:rPr>
+              <a:t>freight_cost_usd</a:t>
+            </a:r>
+            <a:endParaRPr lang="en-US" altLang="en-GB"/>
+          </a:p>
+          <a:p>
+            <a:r>
+              <a:rPr lang="sr-Latn-RS" altLang="en-US">
+                <a:sym typeface="+mn-ea"/>
+              </a:rPr>
+              <a:t>  -- </a:t>
+            </a:r>
+            <a:r>
+              <a:rPr lang="en-US" altLang="en-GB">
+                <a:sym typeface="+mn-ea"/>
+              </a:rPr>
+              <a:t>insurance_required</a:t>
+            </a:r>
+            <a:endParaRPr lang="en-US" altLang="en-GB"/>
+          </a:p>
+          <a:p>
+            <a:pPr marL="0" indent="0">
+              <a:buNone/>
+            </a:pPr>
+            <a:endParaRPr lang="en-GB" altLang="en-US"/>
+          </a:p>
+        </p:txBody>
+      </p:sp>
+    </p:spTree>
+  </p:cSld>
+  <p:clrMapOvr>
+    <a:masterClrMapping/>
+  </p:clrMapOvr>
+</p:sld>
+</file>
+
+<file path=ppt/slides/slide18.xml><?xml version="1.0" encoding="utf-8"?>
+<p:sld xmlns:a="http://schemas.openxmlformats.org/drawingml/2006/main" xmlns:r="http://schemas.openxmlformats.org/officeDocument/2006/relationships" xmlns:p="http://schemas.openxmlformats.org/presentationml/2006/main">
+  <p:cSld>
+    <p:spTree>
+      <p:nvGrpSpPr>
+        <p:cNvPr id="1" name=""/>
+        <p:cNvGrpSpPr/>
+        <p:nvPr/>
+      </p:nvGrpSpPr>
+      <p:grpSpPr/>
+      <p:sp>
+        <p:nvSpPr>
+          <p:cNvPr id="2" name="Title 1"/>
+          <p:cNvSpPr>
+            <a:spLocks noGrp="1"/>
+          </p:cNvSpPr>
+          <p:nvPr>
+            <p:ph type="title"/>
+          </p:nvPr>
+        </p:nvSpPr>
+        <p:spPr/>
+        <p:txBody>
+          <a:bodyPr/>
+          <a:p>
+            <a:endParaRPr lang="en-GB" altLang="en-US"/>
+          </a:p>
+        </p:txBody>
+      </p:sp>
+      <p:sp>
+        <p:nvSpPr>
+          <p:cNvPr id="3" name="Content Placeholder 2"/>
+          <p:cNvSpPr>
+            <a:spLocks noGrp="1"/>
+          </p:cNvSpPr>
+          <p:nvPr>
+            <p:ph idx="1"/>
+          </p:nvPr>
+        </p:nvSpPr>
+        <p:spPr/>
+        <p:txBody>
+          <a:bodyPr/>
+          <a:p>
+            <a:pPr marL="0" indent="0">
+              <a:buNone/>
+            </a:pPr>
+            <a:endParaRPr lang="en-US" altLang="en-US"/>
+          </a:p>
+          <a:p>
+            <a:r>
+              <a:rPr lang="sr-Latn-RS" altLang="en-US">
+                <a:sym typeface="+mn-ea"/>
+              </a:rPr>
+              <a:t>- </a:t>
+            </a:r>
+            <a:r>
+              <a:rPr lang="en-US" altLang="en-GB">
+                <a:sym typeface="+mn-ea"/>
+              </a:rPr>
+              <a:t>fizi</a:t>
+            </a:r>
+            <a:r>
+              <a:rPr lang="en-US" altLang="en-US">
+                <a:sym typeface="+mn-ea"/>
+              </a:rPr>
+              <a:t>č</a:t>
+            </a:r>
+            <a:r>
+              <a:rPr lang="en-US" altLang="en-GB">
+                <a:sym typeface="+mn-ea"/>
+              </a:rPr>
+              <a:t>ki podaci</a:t>
+            </a:r>
+            <a:endParaRPr lang="en-US" altLang="en-GB"/>
+          </a:p>
+          <a:p>
+            <a:r>
+              <a:rPr lang="sr-Latn-RS" altLang="en-US">
+                <a:sym typeface="+mn-ea"/>
+              </a:rPr>
+              <a:t>-- </a:t>
+            </a:r>
+            <a:r>
+              <a:rPr lang="en-US" altLang="en-GB">
+                <a:sym typeface="+mn-ea"/>
+              </a:rPr>
+              <a:t>weight_kg</a:t>
+            </a:r>
+            <a:endParaRPr lang="en-US" altLang="en-GB"/>
+          </a:p>
+          <a:p>
+            <a:r>
+              <a:rPr lang="en-US" altLang="en-GB">
+                <a:sym typeface="+mn-ea"/>
+              </a:rPr>
+              <a:t>   </a:t>
+            </a:r>
+            <a:r>
+              <a:rPr lang="sr-Latn-RS" altLang="en-US">
+                <a:sym typeface="+mn-ea"/>
+              </a:rPr>
+              <a:t>-- </a:t>
+            </a:r>
+            <a:r>
+              <a:rPr lang="en-US" altLang="en-GB">
+                <a:sym typeface="+mn-ea"/>
+              </a:rPr>
+              <a:t>volume_m3</a:t>
+            </a:r>
+            <a:endParaRPr lang="en-US" altLang="en-GB"/>
+          </a:p>
+          <a:p>
+            <a:r>
+              <a:rPr lang="en-US" altLang="en-GB">
+                <a:sym typeface="+mn-ea"/>
+              </a:rPr>
+              <a:t>   </a:t>
+            </a:r>
+            <a:r>
+              <a:rPr lang="sr-Latn-RS" altLang="en-US">
+                <a:sym typeface="+mn-ea"/>
+              </a:rPr>
+              <a:t>-- </a:t>
+            </a:r>
+            <a:r>
+              <a:rPr lang="en-US" altLang="en-GB">
+                <a:sym typeface="+mn-ea"/>
+              </a:rPr>
+              <a:t>num_containers</a:t>
+            </a:r>
+            <a:endParaRPr lang="en-US" altLang="en-US"/>
+          </a:p>
+          <a:p>
+            <a:endParaRPr lang="en-US" altLang="en-GB"/>
+          </a:p>
+          <a:p>
+            <a:endParaRPr lang="en-US" altLang="en-GB"/>
+          </a:p>
+          <a:p>
+            <a:endParaRPr lang="en-GB" altLang="en-US"/>
+          </a:p>
+          <a:p>
+            <a:endParaRPr lang="en-GB" altLang="en-US"/>
+          </a:p>
+        </p:txBody>
+      </p:sp>
+    </p:spTree>
+  </p:cSld>
+  <p:clrMapOvr>
+    <a:masterClrMapping/>
+  </p:clrMapOvr>
+</p:sld>
+</file>
+
+<file path=ppt/slides/slide19.xml><?xml version="1.0" encoding="utf-8"?>
+<p:sld xmlns:a="http://schemas.openxmlformats.org/drawingml/2006/main" xmlns:r="http://schemas.openxmlformats.org/officeDocument/2006/relationships" xmlns:p="http://schemas.openxmlformats.org/presentationml/2006/main">
+  <p:cSld>
+    <p:spTree>
+      <p:nvGrpSpPr>
+        <p:cNvPr id="1" name=""/>
+        <p:cNvGrpSpPr/>
+        <p:nvPr/>
+      </p:nvGrpSpPr>
+      <p:grpSpPr/>
+      <p:sp>
+        <p:nvSpPr>
+          <p:cNvPr id="2" name="Title 1"/>
+          <p:cNvSpPr>
+            <a:spLocks noGrp="1"/>
+          </p:cNvSpPr>
+          <p:nvPr>
+            <p:ph type="title"/>
+          </p:nvPr>
+        </p:nvSpPr>
+        <p:spPr/>
+        <p:txBody>
+          <a:bodyPr/>
+          <a:p>
+            <a:endParaRPr lang="en-GB" altLang="en-US"/>
+          </a:p>
+        </p:txBody>
+      </p:sp>
+      <p:sp>
+        <p:nvSpPr>
+          <p:cNvPr id="3" name="Content Placeholder 2"/>
+          <p:cNvSpPr>
+            <a:spLocks noGrp="1"/>
+          </p:cNvSpPr>
+          <p:nvPr>
+            <p:ph idx="1"/>
+          </p:nvPr>
+        </p:nvSpPr>
+        <p:spPr/>
+        <p:txBody>
+          <a:bodyPr/>
+          <a:p>
+            <a:r>
+              <a:rPr lang="sr-Latn-RS" altLang="en-US">
+                <a:sym typeface="+mn-ea"/>
+              </a:rPr>
+              <a:t>- </a:t>
+            </a:r>
+            <a:r>
+              <a:rPr lang="en-US" altLang="en-GB">
+                <a:sym typeface="+mn-ea"/>
+              </a:rPr>
+              <a:t>informacije o riziku</a:t>
+            </a:r>
+            <a:endParaRPr lang="en-US" altLang="en-GB"/>
+          </a:p>
+          <a:p>
+            <a:r>
+              <a:rPr lang="en-US" altLang="en-GB">
+                <a:sym typeface="+mn-ea"/>
+              </a:rPr>
+              <a:t>    </a:t>
+            </a:r>
+            <a:r>
+              <a:rPr lang="sr-Latn-RS" altLang="en-US">
+                <a:sym typeface="+mn-ea"/>
+              </a:rPr>
+              <a:t>-- </a:t>
+            </a:r>
+            <a:r>
+              <a:rPr lang="en-US" altLang="en-GB">
+                <a:sym typeface="+mn-ea"/>
+              </a:rPr>
+              <a:t>risk_score</a:t>
+            </a:r>
+            <a:endParaRPr lang="en-US" altLang="en-GB"/>
+          </a:p>
+          <a:p>
+            <a:r>
+              <a:rPr lang="en-US" altLang="en-GB">
+                <a:sym typeface="+mn-ea"/>
+              </a:rPr>
+              <a:t>    </a:t>
+            </a:r>
+            <a:r>
+              <a:rPr lang="sr-Latn-RS" altLang="en-US">
+                <a:sym typeface="+mn-ea"/>
+              </a:rPr>
+              <a:t>-- </a:t>
+            </a:r>
+            <a:r>
+              <a:rPr lang="en-US" altLang="en-GB">
+                <a:sym typeface="+mn-ea"/>
+              </a:rPr>
+              <a:t>weather_severity</a:t>
+            </a:r>
+            <a:endParaRPr lang="en-US" altLang="en-GB"/>
+          </a:p>
+          <a:p>
+            <a:r>
+              <a:rPr lang="en-US" altLang="en-GB">
+                <a:sym typeface="+mn-ea"/>
+              </a:rPr>
+              <a:t>    </a:t>
+            </a:r>
+            <a:r>
+              <a:rPr lang="sr-Latn-RS" altLang="en-US">
+                <a:sym typeface="+mn-ea"/>
+              </a:rPr>
+              <a:t>-- </a:t>
+            </a:r>
+            <a:r>
+              <a:rPr lang="en-US" altLang="en-GB">
+                <a:sym typeface="+mn-ea"/>
+              </a:rPr>
+              <a:t>port_congestion</a:t>
+            </a:r>
+            <a:endParaRPr lang="en-US" altLang="en-GB"/>
+          </a:p>
+          <a:p>
+            <a:r>
+              <a:rPr lang="en-US" altLang="en-GB">
+                <a:sym typeface="+mn-ea"/>
+              </a:rPr>
+              <a:t>    </a:t>
+            </a:r>
+            <a:r>
+              <a:rPr lang="sr-Latn-RS" altLang="en-US">
+                <a:sym typeface="+mn-ea"/>
+              </a:rPr>
+              <a:t>-- </a:t>
+            </a:r>
+            <a:r>
+              <a:rPr lang="en-US" altLang="en-GB">
+                <a:sym typeface="+mn-ea"/>
+              </a:rPr>
+              <a:t>temperature_c</a:t>
+            </a:r>
+            <a:endParaRPr lang="en-US" altLang="en-GB"/>
+          </a:p>
+          <a:p>
+            <a:endParaRPr lang="en-GB" altLang="en-US"/>
+          </a:p>
+        </p:txBody>
+      </p:sp>
+    </p:spTree>
+  </p:cSld>
+  <p:clrMapOvr>
+    <a:masterClrMapping/>
+  </p:clrMapOvr>
+</p:sld>
+</file>
+
 <file path=ppt/slides/slide2.xml><?xml version="1.0" encoding="utf-8"?>
 <p:sld xmlns:a="http://schemas.openxmlformats.org/drawingml/2006/main" xmlns:r="http://schemas.openxmlformats.org/officeDocument/2006/relationships" xmlns:p="http://schemas.openxmlformats.org/presentationml/2006/main">
   <p:cSld>
@@ -3379,7 +4748,7 @@
               <a:t>Skup podataka odnosi se na analizu pametne logistike globalnog uvoza i izvoza robe, sa posebnim fokusom na pra</a:t>
             </a:r>
             <a:r>
-              <a:rPr lang="" altLang="en-US"/>
+              <a:rPr lang="en-US" altLang="en-US"/>
               <a:t>ć</a:t>
             </a:r>
             <a:r>
@@ -3387,7 +4756,7 @@
               <a:t>enje po</a:t>
             </a:r>
             <a:r>
-              <a:rPr lang="" altLang="en-US"/>
+              <a:rPr lang="en-US" altLang="en-US"/>
               <a:t>š</a:t>
             </a:r>
             <a:r>
@@ -3395,7 +4764,7 @@
               <a:t>iljaka, transportnih ruta, logisti</a:t>
             </a:r>
             <a:r>
-              <a:rPr lang="" altLang="en-US"/>
+              <a:rPr lang="en-US" altLang="en-US"/>
               <a:t>č</a:t>
             </a:r>
             <a:r>
@@ -3403,7 +4772,7 @@
               <a:t>kih doga</a:t>
             </a:r>
             <a:r>
-              <a:rPr lang="" altLang="en-US"/>
+              <a:rPr lang="en-US" altLang="en-US"/>
               <a:t>đ</a:t>
             </a:r>
             <a:r>
@@ -3414,6 +4783,51 @@
           </a:p>
           <a:p>
             <a:endParaRPr lang="en-US" altLang="en-GB"/>
+          </a:p>
+        </p:txBody>
+      </p:sp>
+    </p:spTree>
+  </p:cSld>
+  <p:clrMapOvr>
+    <a:masterClrMapping/>
+  </p:clrMapOvr>
+</p:sld>
+</file>
+
+<file path=ppt/slides/slide20.xml><?xml version="1.0" encoding="utf-8"?>
+<p:sld xmlns:a="http://schemas.openxmlformats.org/drawingml/2006/main" xmlns:r="http://schemas.openxmlformats.org/officeDocument/2006/relationships" xmlns:p="http://schemas.openxmlformats.org/presentationml/2006/main">
+  <p:cSld>
+    <p:spTree>
+      <p:nvGrpSpPr>
+        <p:cNvPr id="1" name=""/>
+        <p:cNvGrpSpPr/>
+        <p:nvPr/>
+      </p:nvGrpSpPr>
+      <p:grpSpPr/>
+      <p:sp>
+        <p:nvSpPr>
+          <p:cNvPr id="2" name="Title 1"/>
+          <p:cNvSpPr>
+            <a:spLocks noGrp="1"/>
+          </p:cNvSpPr>
+          <p:nvPr>
+            <p:ph type="title"/>
+          </p:nvPr>
+        </p:nvSpPr>
+        <p:spPr>
+          <a:xfrm>
+            <a:off x="691515" y="5073015"/>
+            <a:ext cx="10972800" cy="582613"/>
+          </a:xfrm>
+        </p:spPr>
+        <p:txBody>
+          <a:bodyPr/>
+          <a:p>
+            <a:r>
+              <a:rPr lang="sr-Latn-RS" altLang="en-GB"/>
+              <a:t>Hvala na pažnji!</a:t>
+            </a:r>
+            <a:endParaRPr lang="sr-Latn-RS" altLang="en-GB"/>
           </a:p>
         </p:txBody>
       </p:sp>
@@ -3627,7 +5041,7 @@
                         <a:t>jedinstveni identifikator po</a:t>
                       </a:r>
                       <a:r>
-                        <a:rPr lang="" altLang="en-US" b="0"/>
+                        <a:rPr lang="en-US" altLang="en-US" b="0"/>
                         <a:t>š</a:t>
                       </a:r>
                       <a:r>
@@ -3737,7 +5151,7 @@
                         <a:t>odredi</a:t>
                       </a:r>
                       <a:r>
-                        <a:rPr lang="" altLang="en-US"/>
+                        <a:rPr lang="en-US" altLang="en-US"/>
                         <a:t>š</a:t>
                       </a:r>
                       <a:r>
@@ -3779,7 +5193,7 @@
                         <a:t>na</a:t>
                       </a:r>
                       <a:r>
-                        <a:rPr lang="" altLang="en-US"/>
+                        <a:rPr lang="en-US" altLang="en-US"/>
                         <a:t>č</a:t>
                       </a:r>
                       <a:r>
@@ -3787,7 +5201,7 @@
                         <a:t>in transporta (pomorski, drumski, </a:t>
                       </a:r>
                       <a:r>
-                        <a:rPr lang="" altLang="en-US"/>
+                        <a:rPr lang="en-US" altLang="en-US"/>
                         <a:t>ž</a:t>
                       </a:r>
                       <a:r>
@@ -3795,7 +5209,7 @@
                         <a:t>elezni</a:t>
                       </a:r>
                       <a:r>
-                        <a:rPr lang="" altLang="en-US"/>
+                        <a:rPr lang="en-US" altLang="en-US"/>
                         <a:t>č</a:t>
                       </a:r>
                       <a:r>
@@ -3803,7 +5217,7 @@
                         <a:t>ki i sli</a:t>
                       </a:r>
                       <a:r>
-                        <a:rPr lang="" altLang="en-US"/>
+                        <a:rPr lang="en-US" altLang="en-US"/>
                         <a:t>č</a:t>
                       </a:r>
                       <a:r>
@@ -3947,7 +5361,7 @@
                         <a:t>o</a:t>
                       </a:r>
                       <a:r>
-                        <a:rPr lang="" altLang="en-US"/>
+                        <a:rPr lang="en-US" altLang="en-US"/>
                         <a:t>č</a:t>
                       </a:r>
                       <a:r>
@@ -4130,7 +5544,7 @@
                         <a:t>vrednost robe u ameri</a:t>
                       </a:r>
                       <a:r>
-                        <a:rPr lang="" altLang="en-US"/>
+                        <a:rPr lang="en-US" altLang="en-US"/>
                         <a:t>č</a:t>
                       </a:r>
                       <a:r>
@@ -4172,7 +5586,7 @@
                         <a:t>tro</a:t>
                       </a:r>
                       <a:r>
-                        <a:rPr lang="" altLang="en-US"/>
+                        <a:rPr lang="en-US" altLang="en-US"/>
                         <a:t>š</a:t>
                       </a:r>
                       <a:r>
@@ -4214,7 +5628,7 @@
                         <a:t>ukupno ka</a:t>
                       </a:r>
                       <a:r>
-                        <a:rPr lang="" altLang="en-US"/>
+                        <a:rPr lang="en-US" altLang="en-US"/>
                         <a:t>š</a:t>
                       </a:r>
                       <a:r>
@@ -4431,7 +5845,7 @@
                         <a:t>jedinstveni identifikator doga</a:t>
                       </a:r>
                       <a:r>
-                        <a:rPr lang="" altLang="en-US" b="0"/>
+                        <a:rPr lang="en-US" altLang="en-US" b="0"/>
                         <a:t>đ</a:t>
                       </a:r>
                       <a:r>
@@ -4473,7 +5887,7 @@
                         <a:t>identifikator po</a:t>
                       </a:r>
                       <a:r>
-                        <a:rPr lang="" altLang="en-US"/>
+                        <a:rPr lang="en-US" altLang="en-US"/>
                         <a:t>š</a:t>
                       </a:r>
                       <a:r>
@@ -4515,7 +5929,7 @@
                         <a:t>tip doga</a:t>
                       </a:r>
                       <a:r>
-                        <a:rPr lang="" altLang="en-US"/>
+                        <a:rPr lang="en-US" altLang="en-US"/>
                         <a:t>đ</a:t>
                       </a:r>
                       <a:r>
@@ -4557,7 +5971,7 @@
                         <a:t>vreme nastanka doga</a:t>
                       </a:r>
                       <a:r>
-                        <a:rPr lang="" altLang="en-US"/>
+                        <a:rPr lang="en-US" altLang="en-US"/>
                         <a:t>đ</a:t>
                       </a:r>
                       <a:r>
@@ -4599,7 +6013,7 @@
                         <a:t>lokacija doga</a:t>
                       </a:r>
                       <a:r>
-                        <a:rPr lang="" altLang="en-US"/>
+                        <a:rPr lang="en-US" altLang="en-US"/>
                         <a:t>đ</a:t>
                       </a:r>
                       <a:r>
@@ -4854,7 +6268,7 @@
                         <a:t>vla</a:t>
                       </a:r>
                       <a:r>
-                        <a:rPr lang="" altLang="en-US" b="0"/>
+                        <a:rPr lang="en-US" altLang="en-US" b="0"/>
                         <a:t>ž</a:t>
                       </a:r>
                       <a:r>
@@ -4930,7 +6344,7 @@
                         <a:t>dodatno ka</a:t>
                       </a:r>
                       <a:r>
-                        <a:rPr lang="" altLang="en-US"/>
+                        <a:rPr lang="en-US" altLang="en-US"/>
                         <a:t>š</a:t>
                       </a:r>
                       <a:r>
@@ -4938,7 +6352,7 @@
                         <a:t>njenje izazvano doga</a:t>
                       </a:r>
                       <a:r>
-                        <a:rPr lang="" altLang="en-US"/>
+                        <a:rPr lang="en-US" altLang="en-US"/>
                         <a:t>đ</a:t>
                       </a:r>
                       <a:r>
@@ -5014,7 +6428,7 @@
                         <a:t>vreme </a:t>
                       </a:r>
                       <a:r>
-                        <a:rPr lang="" altLang="en-US"/>
+                        <a:rPr lang="en-US" altLang="en-US"/>
                         <a:t>č</a:t>
                       </a:r>
                       <a:r>
@@ -5056,7 +6470,7 @@
                         <a:t>potro</a:t>
                       </a:r>
                       <a:r>
-                        <a:rPr lang="" altLang="en-US"/>
+                        <a:rPr lang="en-US" altLang="en-US"/>
                         <a:t>š</a:t>
                       </a:r>
                       <a:r>
@@ -5306,7 +6720,7 @@
           <a:p>
             <a:r>
               <a:rPr lang="sr-Latn-RS" altLang="en-GB"/>
-              <a:t>isporuka (0-*)                                               (1-*) događaj na ruti </a:t>
+              <a:t>isporuka (0-*)                           (1-*) događaj na ruti </a:t>
             </a:r>
             <a:endParaRPr lang="sr-Latn-RS" altLang="en-GB"/>
           </a:p>
@@ -5323,8 +6737,8 @@
         </p:nvCxnSpPr>
         <p:spPr>
           <a:xfrm>
-            <a:off x="3444875" y="2583815"/>
-            <a:ext cx="3209925" cy="7620"/>
+            <a:off x="3554730" y="2063750"/>
+            <a:ext cx="2843784" cy="7620"/>
           </a:xfrm>
           <a:prstGeom prst="line">
             <a:avLst/>
@@ -5409,7 +6823,108 @@
         <p:txBody>
           <a:bodyPr/>
           <a:p>
-            <a:endParaRPr lang="en-GB" altLang="en-US"/>
+            <a:r>
+              <a:rPr lang="en-US" altLang="en-GB" sz="2800"/>
+              <a:t>Logi</a:t>
+            </a:r>
+            <a:r>
+              <a:rPr lang="" altLang="en-US" sz="2800"/>
+              <a:t>č</a:t>
+            </a:r>
+            <a:r>
+              <a:rPr lang="en-US" altLang="en-GB" sz="2800"/>
+              <a:t>ka </a:t>
+            </a:r>
+            <a:r>
+              <a:rPr lang="" altLang="en-US" sz="2800"/>
+              <a:t>š</a:t>
+            </a:r>
+            <a:r>
+              <a:rPr lang="en-US" altLang="en-GB" sz="2800"/>
+              <a:t>ema bi se sastojala od slede</a:t>
+            </a:r>
+            <a:r>
+              <a:rPr lang="" altLang="en-US" sz="2800"/>
+              <a:t>ć</a:t>
+            </a:r>
+            <a:r>
+              <a:rPr lang="en-US" altLang="en-GB" sz="2800"/>
+              <a:t>ih kolekcija:</a:t>
+            </a:r>
+            <a:endParaRPr lang="en-US" altLang="en-GB" sz="2800"/>
+          </a:p>
+          <a:p>
+            <a:r>
+              <a:rPr lang="en-US" altLang="en-GB" sz="2800"/>
+              <a:t>route_events:</a:t>
+            </a:r>
+            <a:endParaRPr lang="en-US" altLang="en-US" sz="2800"/>
+          </a:p>
+          <a:p>
+            <a:r>
+              <a:rPr lang="sr-Latn-RS" altLang="en-US" sz="2800"/>
+              <a:t>- </a:t>
+            </a:r>
+            <a:r>
+              <a:rPr lang="en-US" altLang="en-GB" sz="2800"/>
+              <a:t>event_id</a:t>
+            </a:r>
+            <a:endParaRPr lang="en-US" altLang="en-GB" sz="2800"/>
+          </a:p>
+          <a:p>
+            <a:r>
+              <a:rPr lang="sr-Latn-RS" altLang="en-US" sz="2800"/>
+              <a:t>-</a:t>
+            </a:r>
+            <a:r>
+              <a:rPr lang="en-US" altLang="en-GB" sz="2800"/>
+              <a:t> shipment_id</a:t>
+            </a:r>
+            <a:endParaRPr lang="en-US" altLang="en-US" sz="2800"/>
+          </a:p>
+          <a:p>
+            <a:r>
+              <a:rPr lang="sr-Latn-RS" altLang="en-US" sz="2800"/>
+              <a:t>-</a:t>
+            </a:r>
+            <a:r>
+              <a:rPr lang="en-US" altLang="en-GB" sz="2800"/>
+              <a:t> doga</a:t>
+            </a:r>
+            <a:r>
+              <a:rPr lang="" altLang="en-US" sz="2800"/>
+              <a:t>đ</a:t>
+            </a:r>
+            <a:r>
+              <a:rPr lang="en-US" altLang="en-GB" sz="2800"/>
+              <a:t>aj</a:t>
+            </a:r>
+            <a:endParaRPr lang="en-US" altLang="en-GB" sz="2800"/>
+          </a:p>
+          <a:p>
+            <a:r>
+              <a:rPr lang="sr-Latn-RS" altLang="en-US" sz="2800"/>
+              <a:t>  --</a:t>
+            </a:r>
+            <a:r>
+              <a:rPr lang="en-US" altLang="en-GB" sz="2800"/>
+              <a:t> event_type</a:t>
+            </a:r>
+            <a:endParaRPr lang="en-US" altLang="en-GB" sz="2800"/>
+          </a:p>
+          <a:p>
+            <a:r>
+              <a:rPr lang="sr-Latn-RS" altLang="en-US" sz="2800"/>
+              <a:t>  --</a:t>
+            </a:r>
+            <a:r>
+              <a:rPr lang="en-US" altLang="en-GB" sz="2800"/>
+              <a:t> event_timestamp</a:t>
+            </a:r>
+            <a:endParaRPr lang="en-US" altLang="en-US" sz="2800"/>
+          </a:p>
+          <a:p>
+            <a:endParaRPr lang="en-US" altLang="en-US" sz="2800"/>
           </a:p>
         </p:txBody>
       </p:sp>
